--- a/Fase 1 - Planificación/Grupal/Presentación Proyecto.pptx
+++ b/Fase 1 - Planificación/Grupal/Presentación Proyecto.pptx
@@ -11880,7 +11880,7 @@
                 </a:solidFill>
                 <a:latin typeface="Calibri"/>
               </a:rPr>
-              <a:t>Exequiel Alvarado · Diana Guerrero · Cristian Jorquera · Manuel Jansen</a:t>
+              <a:t>Exequiel Alvarado · Diana Guerrero · Manuel Jansen · Cristian Jorquera</a:t>
             </a:r>
           </a:p>
           <a:p>
@@ -14322,7 +14322,7 @@
                 </a:solidFill>
                 <a:latin typeface="Calibri"/>
               </a:rPr>
-              <a:t>2 de 2 · cierre del desarrollo y presentación</a:t>
+              <a:t>2 de 2 · cierre del desarrollo y presentación (semanas 10 a 18)</a:t>
             </a:r>
           </a:p>
         </p:txBody>
@@ -14363,7 +14363,7 @@
         </p:nvGraphicFramePr>
         <p:xfrm>
           <a:off x="684000" y="2448000"/>
-          <a:ext cx="10835982" cy="2736000"/>
+          <a:ext cx="10835982" cy="3024000"/>
         </p:xfrm>
         <a:graphic>
           <a:graphicData uri="http://schemas.openxmlformats.org/drawingml/2006/table">
@@ -14392,7 +14392,7 @@
                 <a:gridCol w="413999"/>
                 <a:gridCol w="413999"/>
               </a:tblGrid>
-              <a:tr h="295200">
+              <a:tr h="539712">
                 <a:tc>
                   <a:txBody>
                     <a:bodyPr/>
@@ -14443,13 +14443,13 @@
                     <a:p>
                       <a:pPr algn="ctr"/>
                       <a:r>
-                        <a:rPr sz="1200" b="1">
+                        <a:rPr sz="1100" b="1">
                           <a:solidFill>
                             <a:srgbClr val="000000"/>
                           </a:solidFill>
                           <a:latin typeface="Calibri"/>
                         </a:rPr>
-                        <a:t>Fase 1</a:t>
+                        <a:t>Fase 1: Planificación</a:t>
                       </a:r>
                     </a:p>
                   </a:txBody>
@@ -14608,20 +14608,20 @@
                     </a:solidFill>
                   </a:tcPr>
                 </a:tc>
-                <a:tc gridSpan="12">
+                <a:tc gridSpan="11">
                   <a:txBody>
                     <a:bodyPr/>
                     <a:lstStyle/>
                     <a:p>
                       <a:pPr algn="ctr"/>
                       <a:r>
-                        <a:rPr sz="1200" b="1">
+                        <a:rPr sz="1100" b="1">
                           <a:solidFill>
                             <a:srgbClr val="000000"/>
                           </a:solidFill>
                           <a:latin typeface="Calibri"/>
                         </a:rPr>
-                        <a:t>Fase 2</a:t>
+                        <a:t>Fase 2: Desarrollo del proyecto</a:t>
                       </a:r>
                     </a:p>
                   </a:txBody>
@@ -15081,6 +15081,49 @@
                     </a:solidFill>
                   </a:tcPr>
                 </a:tc>
+                <a:tc gridSpan="3">
+                  <a:txBody>
+                    <a:bodyPr/>
+                    <a:lstStyle/>
+                    <a:p>
+                      <a:pPr algn="ctr"/>
+                      <a:r>
+                        <a:rPr sz="1100" b="1">
+                          <a:solidFill>
+                            <a:srgbClr val="000000"/>
+                          </a:solidFill>
+                          <a:latin typeface="Calibri"/>
+                        </a:rPr>
+                        <a:t>Fase 3: Presentación Final</a:t>
+                      </a:r>
+                    </a:p>
+                  </a:txBody>
+                  <a:tcPr marL="43200" marR="43200" marT="14400" marB="14400" anchor="ctr">
+                    <a:lnL w="6350" cap="flat" cmpd="sng" algn="ctr">
+                      <a:solidFill>
+                        <a:srgbClr val="BFBFBF"/>
+                      </a:solidFill>
+                    </a:lnL>
+                    <a:lnR w="6350" cap="flat" cmpd="sng" algn="ctr">
+                      <a:solidFill>
+                        <a:srgbClr val="BFBFBF"/>
+                      </a:solidFill>
+                    </a:lnR>
+                    <a:lnT w="6350" cap="flat" cmpd="sng" algn="ctr">
+                      <a:solidFill>
+                        <a:srgbClr val="BFBFBF"/>
+                      </a:solidFill>
+                    </a:lnT>
+                    <a:lnB w="6350" cap="flat" cmpd="sng" algn="ctr">
+                      <a:solidFill>
+                        <a:srgbClr val="BFBFBF"/>
+                      </a:solidFill>
+                    </a:lnB>
+                    <a:solidFill>
+                      <a:srgbClr val="FBE4D5"/>
+                    </a:solidFill>
+                  </a:tcPr>
+                </a:tc>
                 <a:tc hMerge="1">
                   <a:txBody>
                     <a:bodyPr/>
@@ -15095,49 +15138,6 @@
                           <a:latin typeface="Calibri"/>
                         </a:rPr>
                         <a:t/>
-                      </a:r>
-                    </a:p>
-                  </a:txBody>
-                  <a:tcPr marL="43200" marR="43200" marT="14400" marB="14400" anchor="ctr">
-                    <a:lnL w="6350" cap="flat" cmpd="sng" algn="ctr">
-                      <a:solidFill>
-                        <a:srgbClr val="BFBFBF"/>
-                      </a:solidFill>
-                    </a:lnL>
-                    <a:lnR w="6350" cap="flat" cmpd="sng" algn="ctr">
-                      <a:solidFill>
-                        <a:srgbClr val="BFBFBF"/>
-                      </a:solidFill>
-                    </a:lnR>
-                    <a:lnT w="6350" cap="flat" cmpd="sng" algn="ctr">
-                      <a:solidFill>
-                        <a:srgbClr val="BFBFBF"/>
-                      </a:solidFill>
-                    </a:lnT>
-                    <a:lnB w="6350" cap="flat" cmpd="sng" algn="ctr">
-                      <a:solidFill>
-                        <a:srgbClr val="BFBFBF"/>
-                      </a:solidFill>
-                    </a:lnB>
-                    <a:solidFill>
-                      <a:srgbClr val="FFF2CC"/>
-                    </a:solidFill>
-                  </a:tcPr>
-                </a:tc>
-                <a:tc gridSpan="2">
-                  <a:txBody>
-                    <a:bodyPr/>
-                    <a:lstStyle/>
-                    <a:p>
-                      <a:pPr algn="ctr"/>
-                      <a:r>
-                        <a:rPr sz="1200" b="1">
-                          <a:solidFill>
-                            <a:srgbClr val="000000"/>
-                          </a:solidFill>
-                          <a:latin typeface="Calibri"/>
-                        </a:rPr>
-                        <a:t>Fase 3</a:t>
                       </a:r>
                     </a:p>
                   </a:txBody>
@@ -16030,7 +16030,7 @@
                   </a:tcPr>
                 </a:tc>
               </a:tr>
-              <a:tr h="367200">
+              <a:tr h="280836">
                 <a:tc>
                   <a:txBody>
                     <a:bodyPr/>
@@ -16044,7 +16044,7 @@
                           </a:solidFill>
                           <a:latin typeface="Calibri"/>
                         </a:rPr>
-                        <a:t>Chat web: enlace único y widget embebible</a:t>
+                        <a:t>Integración con backend</a:t>
                       </a:r>
                     </a:p>
                   </a:txBody>
@@ -16543,7 +16543,7 @@
                       </a:solidFill>
                     </a:lnB>
                     <a:solidFill>
-                      <a:srgbClr val="FFD966"/>
+                      <a:srgbClr val="FFFFFF"/>
                     </a:solidFill>
                   </a:tcPr>
                 </a:tc>
@@ -16849,7 +16849,7 @@
                   </a:tcPr>
                 </a:tc>
               </a:tr>
-              <a:tr h="367200">
+              <a:tr h="280836">
                 <a:tc>
                   <a:txBody>
                     <a:bodyPr/>
@@ -16857,13 +16857,13 @@
                     <a:p>
                       <a:pPr algn="l"/>
                       <a:r>
-                        <a:rPr sz="1200" b="0">
+                        <a:rPr sz="1200" b="1">
                           <a:solidFill>
                             <a:srgbClr val="000000"/>
                           </a:solidFill>
                           <a:latin typeface="Calibri"/>
                         </a:rPr>
-                        <a:t>Derivación humana y consola de agente</a:t>
+                        <a:t>Primera entrega de avance</a:t>
                       </a:r>
                     </a:p>
                   </a:txBody>
@@ -17405,7 +17405,7 @@
                       </a:solidFill>
                     </a:lnB>
                     <a:solidFill>
-                      <a:srgbClr val="FFD966"/>
+                      <a:srgbClr val="FFFFFF"/>
                     </a:solidFill>
                   </a:tcPr>
                 </a:tc>
@@ -17668,7 +17668,7 @@
                   </a:tcPr>
                 </a:tc>
               </a:tr>
-              <a:tr h="367200">
+              <a:tr h="280836">
                 <a:tc>
                   <a:txBody>
                     <a:bodyPr/>
@@ -17682,7 +17682,7 @@
                           </a:solidFill>
                           <a:latin typeface="Calibri"/>
                         </a:rPr>
-                        <a:t>Dashboards y consumo de tokens por período</a:t>
+                        <a:t>Ajustes de primera entrega</a:t>
                       </a:r>
                     </a:p>
                   </a:txBody>
@@ -18224,6 +18224,825 @@
                       </a:solidFill>
                     </a:lnB>
                     <a:solidFill>
+                      <a:srgbClr val="FFD966"/>
+                    </a:solidFill>
+                  </a:tcPr>
+                </a:tc>
+                <a:tc>
+                  <a:txBody>
+                    <a:bodyPr/>
+                    <a:lstStyle/>
+                    <a:p>
+                      <a:pPr algn="ctr"/>
+                      <a:r>
+                        <a:rPr sz="1000" b="0">
+                          <a:solidFill>
+                            <a:srgbClr val="000000"/>
+                          </a:solidFill>
+                          <a:latin typeface="Calibri"/>
+                        </a:rPr>
+                        <a:t/>
+                      </a:r>
+                    </a:p>
+                  </a:txBody>
+                  <a:tcPr marL="43200" marR="43200" marT="14400" marB="14400" anchor="ctr">
+                    <a:lnL w="6350" cap="flat" cmpd="sng" algn="ctr">
+                      <a:solidFill>
+                        <a:srgbClr val="BFBFBF"/>
+                      </a:solidFill>
+                    </a:lnL>
+                    <a:lnR w="6350" cap="flat" cmpd="sng" algn="ctr">
+                      <a:solidFill>
+                        <a:srgbClr val="BFBFBF"/>
+                      </a:solidFill>
+                    </a:lnR>
+                    <a:lnT w="6350" cap="flat" cmpd="sng" algn="ctr">
+                      <a:solidFill>
+                        <a:srgbClr val="BFBFBF"/>
+                      </a:solidFill>
+                    </a:lnT>
+                    <a:lnB w="6350" cap="flat" cmpd="sng" algn="ctr">
+                      <a:solidFill>
+                        <a:srgbClr val="BFBFBF"/>
+                      </a:solidFill>
+                    </a:lnB>
+                    <a:solidFill>
+                      <a:srgbClr val="FFFFFF"/>
+                    </a:solidFill>
+                  </a:tcPr>
+                </a:tc>
+                <a:tc>
+                  <a:txBody>
+                    <a:bodyPr/>
+                    <a:lstStyle/>
+                    <a:p>
+                      <a:pPr algn="ctr"/>
+                      <a:r>
+                        <a:rPr sz="1000" b="0">
+                          <a:solidFill>
+                            <a:srgbClr val="000000"/>
+                          </a:solidFill>
+                          <a:latin typeface="Calibri"/>
+                        </a:rPr>
+                        <a:t/>
+                      </a:r>
+                    </a:p>
+                  </a:txBody>
+                  <a:tcPr marL="43200" marR="43200" marT="14400" marB="14400" anchor="ctr">
+                    <a:lnL w="6350" cap="flat" cmpd="sng" algn="ctr">
+                      <a:solidFill>
+                        <a:srgbClr val="BFBFBF"/>
+                      </a:solidFill>
+                    </a:lnL>
+                    <a:lnR w="6350" cap="flat" cmpd="sng" algn="ctr">
+                      <a:solidFill>
+                        <a:srgbClr val="BFBFBF"/>
+                      </a:solidFill>
+                    </a:lnR>
+                    <a:lnT w="6350" cap="flat" cmpd="sng" algn="ctr">
+                      <a:solidFill>
+                        <a:srgbClr val="BFBFBF"/>
+                      </a:solidFill>
+                    </a:lnT>
+                    <a:lnB w="6350" cap="flat" cmpd="sng" algn="ctr">
+                      <a:solidFill>
+                        <a:srgbClr val="BFBFBF"/>
+                      </a:solidFill>
+                    </a:lnB>
+                    <a:solidFill>
+                      <a:srgbClr val="FFFFFF"/>
+                    </a:solidFill>
+                  </a:tcPr>
+                </a:tc>
+                <a:tc>
+                  <a:txBody>
+                    <a:bodyPr/>
+                    <a:lstStyle/>
+                    <a:p>
+                      <a:pPr algn="ctr"/>
+                      <a:r>
+                        <a:rPr sz="1000" b="0">
+                          <a:solidFill>
+                            <a:srgbClr val="000000"/>
+                          </a:solidFill>
+                          <a:latin typeface="Calibri"/>
+                        </a:rPr>
+                        <a:t/>
+                      </a:r>
+                    </a:p>
+                  </a:txBody>
+                  <a:tcPr marL="43200" marR="43200" marT="14400" marB="14400" anchor="ctr">
+                    <a:lnL w="6350" cap="flat" cmpd="sng" algn="ctr">
+                      <a:solidFill>
+                        <a:srgbClr val="BFBFBF"/>
+                      </a:solidFill>
+                    </a:lnL>
+                    <a:lnR w="6350" cap="flat" cmpd="sng" algn="ctr">
+                      <a:solidFill>
+                        <a:srgbClr val="BFBFBF"/>
+                      </a:solidFill>
+                    </a:lnR>
+                    <a:lnT w="6350" cap="flat" cmpd="sng" algn="ctr">
+                      <a:solidFill>
+                        <a:srgbClr val="BFBFBF"/>
+                      </a:solidFill>
+                    </a:lnT>
+                    <a:lnB w="6350" cap="flat" cmpd="sng" algn="ctr">
+                      <a:solidFill>
+                        <a:srgbClr val="BFBFBF"/>
+                      </a:solidFill>
+                    </a:lnB>
+                    <a:solidFill>
+                      <a:srgbClr val="FFFFFF"/>
+                    </a:solidFill>
+                  </a:tcPr>
+                </a:tc>
+                <a:tc>
+                  <a:txBody>
+                    <a:bodyPr/>
+                    <a:lstStyle/>
+                    <a:p>
+                      <a:pPr algn="ctr"/>
+                      <a:r>
+                        <a:rPr sz="1000" b="0">
+                          <a:solidFill>
+                            <a:srgbClr val="000000"/>
+                          </a:solidFill>
+                          <a:latin typeface="Calibri"/>
+                        </a:rPr>
+                        <a:t/>
+                      </a:r>
+                    </a:p>
+                  </a:txBody>
+                  <a:tcPr marL="43200" marR="43200" marT="14400" marB="14400" anchor="ctr">
+                    <a:lnL w="6350" cap="flat" cmpd="sng" algn="ctr">
+                      <a:solidFill>
+                        <a:srgbClr val="BFBFBF"/>
+                      </a:solidFill>
+                    </a:lnL>
+                    <a:lnR w="6350" cap="flat" cmpd="sng" algn="ctr">
+                      <a:solidFill>
+                        <a:srgbClr val="BFBFBF"/>
+                      </a:solidFill>
+                    </a:lnR>
+                    <a:lnT w="6350" cap="flat" cmpd="sng" algn="ctr">
+                      <a:solidFill>
+                        <a:srgbClr val="BFBFBF"/>
+                      </a:solidFill>
+                    </a:lnT>
+                    <a:lnB w="6350" cap="flat" cmpd="sng" algn="ctr">
+                      <a:solidFill>
+                        <a:srgbClr val="BFBFBF"/>
+                      </a:solidFill>
+                    </a:lnB>
+                    <a:solidFill>
+                      <a:srgbClr val="FFFFFF"/>
+                    </a:solidFill>
+                  </a:tcPr>
+                </a:tc>
+                <a:tc>
+                  <a:txBody>
+                    <a:bodyPr/>
+                    <a:lstStyle/>
+                    <a:p>
+                      <a:pPr algn="ctr"/>
+                      <a:r>
+                        <a:rPr sz="1000" b="0">
+                          <a:solidFill>
+                            <a:srgbClr val="000000"/>
+                          </a:solidFill>
+                          <a:latin typeface="Calibri"/>
+                        </a:rPr>
+                        <a:t/>
+                      </a:r>
+                    </a:p>
+                  </a:txBody>
+                  <a:tcPr marL="43200" marR="43200" marT="14400" marB="14400" anchor="ctr">
+                    <a:lnL w="6350" cap="flat" cmpd="sng" algn="ctr">
+                      <a:solidFill>
+                        <a:srgbClr val="BFBFBF"/>
+                      </a:solidFill>
+                    </a:lnL>
+                    <a:lnR w="6350" cap="flat" cmpd="sng" algn="ctr">
+                      <a:solidFill>
+                        <a:srgbClr val="BFBFBF"/>
+                      </a:solidFill>
+                    </a:lnR>
+                    <a:lnT w="6350" cap="flat" cmpd="sng" algn="ctr">
+                      <a:solidFill>
+                        <a:srgbClr val="BFBFBF"/>
+                      </a:solidFill>
+                    </a:lnT>
+                    <a:lnB w="6350" cap="flat" cmpd="sng" algn="ctr">
+                      <a:solidFill>
+                        <a:srgbClr val="BFBFBF"/>
+                      </a:solidFill>
+                    </a:lnB>
+                    <a:solidFill>
+                      <a:srgbClr val="FFFFFF"/>
+                    </a:solidFill>
+                  </a:tcPr>
+                </a:tc>
+                <a:tc>
+                  <a:txBody>
+                    <a:bodyPr/>
+                    <a:lstStyle/>
+                    <a:p>
+                      <a:pPr algn="ctr"/>
+                      <a:r>
+                        <a:rPr sz="1000" b="0">
+                          <a:solidFill>
+                            <a:srgbClr val="000000"/>
+                          </a:solidFill>
+                          <a:latin typeface="Calibri"/>
+                        </a:rPr>
+                        <a:t/>
+                      </a:r>
+                    </a:p>
+                  </a:txBody>
+                  <a:tcPr marL="43200" marR="43200" marT="14400" marB="14400" anchor="ctr">
+                    <a:lnL w="6350" cap="flat" cmpd="sng" algn="ctr">
+                      <a:solidFill>
+                        <a:srgbClr val="BFBFBF"/>
+                      </a:solidFill>
+                    </a:lnL>
+                    <a:lnR w="6350" cap="flat" cmpd="sng" algn="ctr">
+                      <a:solidFill>
+                        <a:srgbClr val="BFBFBF"/>
+                      </a:solidFill>
+                    </a:lnR>
+                    <a:lnT w="6350" cap="flat" cmpd="sng" algn="ctr">
+                      <a:solidFill>
+                        <a:srgbClr val="BFBFBF"/>
+                      </a:solidFill>
+                    </a:lnT>
+                    <a:lnB w="6350" cap="flat" cmpd="sng" algn="ctr">
+                      <a:solidFill>
+                        <a:srgbClr val="BFBFBF"/>
+                      </a:solidFill>
+                    </a:lnB>
+                    <a:solidFill>
+                      <a:srgbClr val="FFFFFF"/>
+                    </a:solidFill>
+                  </a:tcPr>
+                </a:tc>
+              </a:tr>
+              <a:tr h="280836">
+                <a:tc>
+                  <a:txBody>
+                    <a:bodyPr/>
+                    <a:lstStyle/>
+                    <a:p>
+                      <a:pPr algn="l"/>
+                      <a:r>
+                        <a:rPr sz="1200" b="0">
+                          <a:solidFill>
+                            <a:srgbClr val="000000"/>
+                          </a:solidFill>
+                          <a:latin typeface="Calibri"/>
+                        </a:rPr>
+                        <a:t>Integración con DeepSeek</a:t>
+                      </a:r>
+                    </a:p>
+                  </a:txBody>
+                  <a:tcPr marL="43200" marR="43200" marT="14400" marB="14400" anchor="ctr">
+                    <a:lnL w="6350" cap="flat" cmpd="sng" algn="ctr">
+                      <a:solidFill>
+                        <a:srgbClr val="BFBFBF"/>
+                      </a:solidFill>
+                    </a:lnL>
+                    <a:lnR w="6350" cap="flat" cmpd="sng" algn="ctr">
+                      <a:solidFill>
+                        <a:srgbClr val="BFBFBF"/>
+                      </a:solidFill>
+                    </a:lnR>
+                    <a:lnT w="6350" cap="flat" cmpd="sng" algn="ctr">
+                      <a:solidFill>
+                        <a:srgbClr val="BFBFBF"/>
+                      </a:solidFill>
+                    </a:lnT>
+                    <a:lnB w="6350" cap="flat" cmpd="sng" algn="ctr">
+                      <a:solidFill>
+                        <a:srgbClr val="BFBFBF"/>
+                      </a:solidFill>
+                    </a:lnB>
+                    <a:solidFill>
+                      <a:srgbClr val="FFFFFF"/>
+                    </a:solidFill>
+                  </a:tcPr>
+                </a:tc>
+                <a:tc>
+                  <a:txBody>
+                    <a:bodyPr/>
+                    <a:lstStyle/>
+                    <a:p>
+                      <a:pPr algn="ctr"/>
+                      <a:r>
+                        <a:rPr sz="1000" b="0">
+                          <a:solidFill>
+                            <a:srgbClr val="000000"/>
+                          </a:solidFill>
+                          <a:latin typeface="Calibri"/>
+                        </a:rPr>
+                        <a:t/>
+                      </a:r>
+                    </a:p>
+                  </a:txBody>
+                  <a:tcPr marL="43200" marR="43200" marT="14400" marB="14400" anchor="ctr">
+                    <a:lnL w="6350" cap="flat" cmpd="sng" algn="ctr">
+                      <a:solidFill>
+                        <a:srgbClr val="BFBFBF"/>
+                      </a:solidFill>
+                    </a:lnL>
+                    <a:lnR w="6350" cap="flat" cmpd="sng" algn="ctr">
+                      <a:solidFill>
+                        <a:srgbClr val="BFBFBF"/>
+                      </a:solidFill>
+                    </a:lnR>
+                    <a:lnT w="6350" cap="flat" cmpd="sng" algn="ctr">
+                      <a:solidFill>
+                        <a:srgbClr val="BFBFBF"/>
+                      </a:solidFill>
+                    </a:lnT>
+                    <a:lnB w="6350" cap="flat" cmpd="sng" algn="ctr">
+                      <a:solidFill>
+                        <a:srgbClr val="BFBFBF"/>
+                      </a:solidFill>
+                    </a:lnB>
+                    <a:solidFill>
+                      <a:srgbClr val="FFFFFF"/>
+                    </a:solidFill>
+                  </a:tcPr>
+                </a:tc>
+                <a:tc>
+                  <a:txBody>
+                    <a:bodyPr/>
+                    <a:lstStyle/>
+                    <a:p>
+                      <a:pPr algn="ctr"/>
+                      <a:r>
+                        <a:rPr sz="1000" b="0">
+                          <a:solidFill>
+                            <a:srgbClr val="000000"/>
+                          </a:solidFill>
+                          <a:latin typeface="Calibri"/>
+                        </a:rPr>
+                        <a:t/>
+                      </a:r>
+                    </a:p>
+                  </a:txBody>
+                  <a:tcPr marL="43200" marR="43200" marT="14400" marB="14400" anchor="ctr">
+                    <a:lnL w="6350" cap="flat" cmpd="sng" algn="ctr">
+                      <a:solidFill>
+                        <a:srgbClr val="BFBFBF"/>
+                      </a:solidFill>
+                    </a:lnL>
+                    <a:lnR w="6350" cap="flat" cmpd="sng" algn="ctr">
+                      <a:solidFill>
+                        <a:srgbClr val="BFBFBF"/>
+                      </a:solidFill>
+                    </a:lnR>
+                    <a:lnT w="6350" cap="flat" cmpd="sng" algn="ctr">
+                      <a:solidFill>
+                        <a:srgbClr val="BFBFBF"/>
+                      </a:solidFill>
+                    </a:lnT>
+                    <a:lnB w="6350" cap="flat" cmpd="sng" algn="ctr">
+                      <a:solidFill>
+                        <a:srgbClr val="BFBFBF"/>
+                      </a:solidFill>
+                    </a:lnB>
+                    <a:solidFill>
+                      <a:srgbClr val="FFFFFF"/>
+                    </a:solidFill>
+                  </a:tcPr>
+                </a:tc>
+                <a:tc>
+                  <a:txBody>
+                    <a:bodyPr/>
+                    <a:lstStyle/>
+                    <a:p>
+                      <a:pPr algn="ctr"/>
+                      <a:r>
+                        <a:rPr sz="1000" b="0">
+                          <a:solidFill>
+                            <a:srgbClr val="000000"/>
+                          </a:solidFill>
+                          <a:latin typeface="Calibri"/>
+                        </a:rPr>
+                        <a:t/>
+                      </a:r>
+                    </a:p>
+                  </a:txBody>
+                  <a:tcPr marL="43200" marR="43200" marT="14400" marB="14400" anchor="ctr">
+                    <a:lnL w="6350" cap="flat" cmpd="sng" algn="ctr">
+                      <a:solidFill>
+                        <a:srgbClr val="BFBFBF"/>
+                      </a:solidFill>
+                    </a:lnL>
+                    <a:lnR w="6350" cap="flat" cmpd="sng" algn="ctr">
+                      <a:solidFill>
+                        <a:srgbClr val="BFBFBF"/>
+                      </a:solidFill>
+                    </a:lnR>
+                    <a:lnT w="6350" cap="flat" cmpd="sng" algn="ctr">
+                      <a:solidFill>
+                        <a:srgbClr val="BFBFBF"/>
+                      </a:solidFill>
+                    </a:lnT>
+                    <a:lnB w="6350" cap="flat" cmpd="sng" algn="ctr">
+                      <a:solidFill>
+                        <a:srgbClr val="BFBFBF"/>
+                      </a:solidFill>
+                    </a:lnB>
+                    <a:solidFill>
+                      <a:srgbClr val="FFFFFF"/>
+                    </a:solidFill>
+                  </a:tcPr>
+                </a:tc>
+                <a:tc>
+                  <a:txBody>
+                    <a:bodyPr/>
+                    <a:lstStyle/>
+                    <a:p>
+                      <a:pPr algn="ctr"/>
+                      <a:r>
+                        <a:rPr sz="1000" b="0">
+                          <a:solidFill>
+                            <a:srgbClr val="000000"/>
+                          </a:solidFill>
+                          <a:latin typeface="Calibri"/>
+                        </a:rPr>
+                        <a:t/>
+                      </a:r>
+                    </a:p>
+                  </a:txBody>
+                  <a:tcPr marL="43200" marR="43200" marT="14400" marB="14400" anchor="ctr">
+                    <a:lnL w="6350" cap="flat" cmpd="sng" algn="ctr">
+                      <a:solidFill>
+                        <a:srgbClr val="BFBFBF"/>
+                      </a:solidFill>
+                    </a:lnL>
+                    <a:lnR w="6350" cap="flat" cmpd="sng" algn="ctr">
+                      <a:solidFill>
+                        <a:srgbClr val="BFBFBF"/>
+                      </a:solidFill>
+                    </a:lnR>
+                    <a:lnT w="6350" cap="flat" cmpd="sng" algn="ctr">
+                      <a:solidFill>
+                        <a:srgbClr val="BFBFBF"/>
+                      </a:solidFill>
+                    </a:lnT>
+                    <a:lnB w="6350" cap="flat" cmpd="sng" algn="ctr">
+                      <a:solidFill>
+                        <a:srgbClr val="BFBFBF"/>
+                      </a:solidFill>
+                    </a:lnB>
+                    <a:solidFill>
+                      <a:srgbClr val="FFFFFF"/>
+                    </a:solidFill>
+                  </a:tcPr>
+                </a:tc>
+                <a:tc>
+                  <a:txBody>
+                    <a:bodyPr/>
+                    <a:lstStyle/>
+                    <a:p>
+                      <a:pPr algn="ctr"/>
+                      <a:r>
+                        <a:rPr sz="1000" b="0">
+                          <a:solidFill>
+                            <a:srgbClr val="000000"/>
+                          </a:solidFill>
+                          <a:latin typeface="Calibri"/>
+                        </a:rPr>
+                        <a:t/>
+                      </a:r>
+                    </a:p>
+                  </a:txBody>
+                  <a:tcPr marL="43200" marR="43200" marT="14400" marB="14400" anchor="ctr">
+                    <a:lnL w="6350" cap="flat" cmpd="sng" algn="ctr">
+                      <a:solidFill>
+                        <a:srgbClr val="BFBFBF"/>
+                      </a:solidFill>
+                    </a:lnL>
+                    <a:lnR w="6350" cap="flat" cmpd="sng" algn="ctr">
+                      <a:solidFill>
+                        <a:srgbClr val="BFBFBF"/>
+                      </a:solidFill>
+                    </a:lnR>
+                    <a:lnT w="6350" cap="flat" cmpd="sng" algn="ctr">
+                      <a:solidFill>
+                        <a:srgbClr val="BFBFBF"/>
+                      </a:solidFill>
+                    </a:lnT>
+                    <a:lnB w="6350" cap="flat" cmpd="sng" algn="ctr">
+                      <a:solidFill>
+                        <a:srgbClr val="BFBFBF"/>
+                      </a:solidFill>
+                    </a:lnB>
+                    <a:solidFill>
+                      <a:srgbClr val="FFFFFF"/>
+                    </a:solidFill>
+                  </a:tcPr>
+                </a:tc>
+                <a:tc>
+                  <a:txBody>
+                    <a:bodyPr/>
+                    <a:lstStyle/>
+                    <a:p>
+                      <a:pPr algn="ctr"/>
+                      <a:r>
+                        <a:rPr sz="1000" b="0">
+                          <a:solidFill>
+                            <a:srgbClr val="000000"/>
+                          </a:solidFill>
+                          <a:latin typeface="Calibri"/>
+                        </a:rPr>
+                        <a:t/>
+                      </a:r>
+                    </a:p>
+                  </a:txBody>
+                  <a:tcPr marL="43200" marR="43200" marT="14400" marB="14400" anchor="ctr">
+                    <a:lnL w="6350" cap="flat" cmpd="sng" algn="ctr">
+                      <a:solidFill>
+                        <a:srgbClr val="BFBFBF"/>
+                      </a:solidFill>
+                    </a:lnL>
+                    <a:lnR w="6350" cap="flat" cmpd="sng" algn="ctr">
+                      <a:solidFill>
+                        <a:srgbClr val="BFBFBF"/>
+                      </a:solidFill>
+                    </a:lnR>
+                    <a:lnT w="6350" cap="flat" cmpd="sng" algn="ctr">
+                      <a:solidFill>
+                        <a:srgbClr val="BFBFBF"/>
+                      </a:solidFill>
+                    </a:lnT>
+                    <a:lnB w="6350" cap="flat" cmpd="sng" algn="ctr">
+                      <a:solidFill>
+                        <a:srgbClr val="BFBFBF"/>
+                      </a:solidFill>
+                    </a:lnB>
+                    <a:solidFill>
+                      <a:srgbClr val="FFFFFF"/>
+                    </a:solidFill>
+                  </a:tcPr>
+                </a:tc>
+                <a:tc>
+                  <a:txBody>
+                    <a:bodyPr/>
+                    <a:lstStyle/>
+                    <a:p>
+                      <a:pPr algn="ctr"/>
+                      <a:r>
+                        <a:rPr sz="1000" b="0">
+                          <a:solidFill>
+                            <a:srgbClr val="000000"/>
+                          </a:solidFill>
+                          <a:latin typeface="Calibri"/>
+                        </a:rPr>
+                        <a:t/>
+                      </a:r>
+                    </a:p>
+                  </a:txBody>
+                  <a:tcPr marL="43200" marR="43200" marT="14400" marB="14400" anchor="ctr">
+                    <a:lnL w="6350" cap="flat" cmpd="sng" algn="ctr">
+                      <a:solidFill>
+                        <a:srgbClr val="BFBFBF"/>
+                      </a:solidFill>
+                    </a:lnL>
+                    <a:lnR w="6350" cap="flat" cmpd="sng" algn="ctr">
+                      <a:solidFill>
+                        <a:srgbClr val="BFBFBF"/>
+                      </a:solidFill>
+                    </a:lnR>
+                    <a:lnT w="6350" cap="flat" cmpd="sng" algn="ctr">
+                      <a:solidFill>
+                        <a:srgbClr val="BFBFBF"/>
+                      </a:solidFill>
+                    </a:lnT>
+                    <a:lnB w="6350" cap="flat" cmpd="sng" algn="ctr">
+                      <a:solidFill>
+                        <a:srgbClr val="BFBFBF"/>
+                      </a:solidFill>
+                    </a:lnB>
+                    <a:solidFill>
+                      <a:srgbClr val="FFFFFF"/>
+                    </a:solidFill>
+                  </a:tcPr>
+                </a:tc>
+                <a:tc>
+                  <a:txBody>
+                    <a:bodyPr/>
+                    <a:lstStyle/>
+                    <a:p>
+                      <a:pPr algn="ctr"/>
+                      <a:r>
+                        <a:rPr sz="1000" b="0">
+                          <a:solidFill>
+                            <a:srgbClr val="000000"/>
+                          </a:solidFill>
+                          <a:latin typeface="Calibri"/>
+                        </a:rPr>
+                        <a:t/>
+                      </a:r>
+                    </a:p>
+                  </a:txBody>
+                  <a:tcPr marL="43200" marR="43200" marT="14400" marB="14400" anchor="ctr">
+                    <a:lnL w="6350" cap="flat" cmpd="sng" algn="ctr">
+                      <a:solidFill>
+                        <a:srgbClr val="BFBFBF"/>
+                      </a:solidFill>
+                    </a:lnL>
+                    <a:lnR w="6350" cap="flat" cmpd="sng" algn="ctr">
+                      <a:solidFill>
+                        <a:srgbClr val="BFBFBF"/>
+                      </a:solidFill>
+                    </a:lnR>
+                    <a:lnT w="6350" cap="flat" cmpd="sng" algn="ctr">
+                      <a:solidFill>
+                        <a:srgbClr val="BFBFBF"/>
+                      </a:solidFill>
+                    </a:lnT>
+                    <a:lnB w="6350" cap="flat" cmpd="sng" algn="ctr">
+                      <a:solidFill>
+                        <a:srgbClr val="BFBFBF"/>
+                      </a:solidFill>
+                    </a:lnB>
+                    <a:solidFill>
+                      <a:srgbClr val="FFFFFF"/>
+                    </a:solidFill>
+                  </a:tcPr>
+                </a:tc>
+                <a:tc>
+                  <a:txBody>
+                    <a:bodyPr/>
+                    <a:lstStyle/>
+                    <a:p>
+                      <a:pPr algn="ctr"/>
+                      <a:r>
+                        <a:rPr sz="1000" b="0">
+                          <a:solidFill>
+                            <a:srgbClr val="000000"/>
+                          </a:solidFill>
+                          <a:latin typeface="Calibri"/>
+                        </a:rPr>
+                        <a:t/>
+                      </a:r>
+                    </a:p>
+                  </a:txBody>
+                  <a:tcPr marL="43200" marR="43200" marT="14400" marB="14400" anchor="ctr">
+                    <a:lnL w="6350" cap="flat" cmpd="sng" algn="ctr">
+                      <a:solidFill>
+                        <a:srgbClr val="BFBFBF"/>
+                      </a:solidFill>
+                    </a:lnL>
+                    <a:lnR w="6350" cap="flat" cmpd="sng" algn="ctr">
+                      <a:solidFill>
+                        <a:srgbClr val="BFBFBF"/>
+                      </a:solidFill>
+                    </a:lnR>
+                    <a:lnT w="6350" cap="flat" cmpd="sng" algn="ctr">
+                      <a:solidFill>
+                        <a:srgbClr val="BFBFBF"/>
+                      </a:solidFill>
+                    </a:lnT>
+                    <a:lnB w="6350" cap="flat" cmpd="sng" algn="ctr">
+                      <a:solidFill>
+                        <a:srgbClr val="BFBFBF"/>
+                      </a:solidFill>
+                    </a:lnB>
+                    <a:solidFill>
+                      <a:srgbClr val="FFFFFF"/>
+                    </a:solidFill>
+                  </a:tcPr>
+                </a:tc>
+                <a:tc>
+                  <a:txBody>
+                    <a:bodyPr/>
+                    <a:lstStyle/>
+                    <a:p>
+                      <a:pPr algn="ctr"/>
+                      <a:r>
+                        <a:rPr sz="1000" b="0">
+                          <a:solidFill>
+                            <a:srgbClr val="000000"/>
+                          </a:solidFill>
+                          <a:latin typeface="Calibri"/>
+                        </a:rPr>
+                        <a:t/>
+                      </a:r>
+                    </a:p>
+                  </a:txBody>
+                  <a:tcPr marL="43200" marR="43200" marT="14400" marB="14400" anchor="ctr">
+                    <a:lnL w="6350" cap="flat" cmpd="sng" algn="ctr">
+                      <a:solidFill>
+                        <a:srgbClr val="BFBFBF"/>
+                      </a:solidFill>
+                    </a:lnL>
+                    <a:lnR w="6350" cap="flat" cmpd="sng" algn="ctr">
+                      <a:solidFill>
+                        <a:srgbClr val="BFBFBF"/>
+                      </a:solidFill>
+                    </a:lnR>
+                    <a:lnT w="6350" cap="flat" cmpd="sng" algn="ctr">
+                      <a:solidFill>
+                        <a:srgbClr val="BFBFBF"/>
+                      </a:solidFill>
+                    </a:lnT>
+                    <a:lnB w="6350" cap="flat" cmpd="sng" algn="ctr">
+                      <a:solidFill>
+                        <a:srgbClr val="BFBFBF"/>
+                      </a:solidFill>
+                    </a:lnB>
+                    <a:solidFill>
+                      <a:srgbClr val="FFFFFF"/>
+                    </a:solidFill>
+                  </a:tcPr>
+                </a:tc>
+                <a:tc>
+                  <a:txBody>
+                    <a:bodyPr/>
+                    <a:lstStyle/>
+                    <a:p>
+                      <a:pPr algn="ctr"/>
+                      <a:r>
+                        <a:rPr sz="1000" b="0">
+                          <a:solidFill>
+                            <a:srgbClr val="000000"/>
+                          </a:solidFill>
+                          <a:latin typeface="Calibri"/>
+                        </a:rPr>
+                        <a:t/>
+                      </a:r>
+                    </a:p>
+                  </a:txBody>
+                  <a:tcPr marL="43200" marR="43200" marT="14400" marB="14400" anchor="ctr">
+                    <a:lnL w="6350" cap="flat" cmpd="sng" algn="ctr">
+                      <a:solidFill>
+                        <a:srgbClr val="BFBFBF"/>
+                      </a:solidFill>
+                    </a:lnL>
+                    <a:lnR w="6350" cap="flat" cmpd="sng" algn="ctr">
+                      <a:solidFill>
+                        <a:srgbClr val="BFBFBF"/>
+                      </a:solidFill>
+                    </a:lnR>
+                    <a:lnT w="6350" cap="flat" cmpd="sng" algn="ctr">
+                      <a:solidFill>
+                        <a:srgbClr val="BFBFBF"/>
+                      </a:solidFill>
+                    </a:lnT>
+                    <a:lnB w="6350" cap="flat" cmpd="sng" algn="ctr">
+                      <a:solidFill>
+                        <a:srgbClr val="BFBFBF"/>
+                      </a:solidFill>
+                    </a:lnB>
+                    <a:solidFill>
+                      <a:srgbClr val="FFFFFF"/>
+                    </a:solidFill>
+                  </a:tcPr>
+                </a:tc>
+                <a:tc>
+                  <a:txBody>
+                    <a:bodyPr/>
+                    <a:lstStyle/>
+                    <a:p>
+                      <a:pPr algn="ctr"/>
+                      <a:r>
+                        <a:rPr sz="1000" b="0">
+                          <a:solidFill>
+                            <a:srgbClr val="000000"/>
+                          </a:solidFill>
+                          <a:latin typeface="Calibri"/>
+                        </a:rPr>
+                        <a:t/>
+                      </a:r>
+                    </a:p>
+                  </a:txBody>
+                  <a:tcPr marL="43200" marR="43200" marT="14400" marB="14400" anchor="ctr">
+                    <a:lnL w="6350" cap="flat" cmpd="sng" algn="ctr">
+                      <a:solidFill>
+                        <a:srgbClr val="BFBFBF"/>
+                      </a:solidFill>
+                    </a:lnL>
+                    <a:lnR w="6350" cap="flat" cmpd="sng" algn="ctr">
+                      <a:solidFill>
+                        <a:srgbClr val="BFBFBF"/>
+                      </a:solidFill>
+                    </a:lnR>
+                    <a:lnT w="6350" cap="flat" cmpd="sng" algn="ctr">
+                      <a:solidFill>
+                        <a:srgbClr val="BFBFBF"/>
+                      </a:solidFill>
+                    </a:lnT>
+                    <a:lnB w="6350" cap="flat" cmpd="sng" algn="ctr">
+                      <a:solidFill>
+                        <a:srgbClr val="BFBFBF"/>
+                      </a:solidFill>
+                    </a:lnB>
+                    <a:solidFill>
                       <a:srgbClr val="FFFFFF"/>
                     </a:solidFill>
                   </a:tcPr>
@@ -18310,7 +19129,7 @@
                       </a:solidFill>
                     </a:lnB>
                     <a:solidFill>
-                      <a:srgbClr val="FFD966"/>
+                      <a:srgbClr val="FFFFFF"/>
                     </a:solidFill>
                   </a:tcPr>
                 </a:tc>
@@ -18487,7 +19306,7 @@
                   </a:tcPr>
                 </a:tc>
               </a:tr>
-              <a:tr h="367200">
+              <a:tr h="280836">
                 <a:tc>
                   <a:txBody>
                     <a:bodyPr/>
@@ -18501,7 +19320,7 @@
                           </a:solidFill>
                           <a:latin typeface="Calibri"/>
                         </a:rPr>
-                        <a:t>Set de preguntas de prueba por cliente</a:t>
+                        <a:t>Ajustes finales</a:t>
                       </a:r>
                     </a:p>
                   </a:txBody>
@@ -19086,7 +19905,7 @@
                       </a:solidFill>
                     </a:lnB>
                     <a:solidFill>
-                      <a:srgbClr val="FFD966"/>
+                      <a:srgbClr val="FFFFFF"/>
                     </a:solidFill>
                   </a:tcPr>
                 </a:tc>
@@ -19172,7 +19991,7 @@
                       </a:solidFill>
                     </a:lnB>
                     <a:solidFill>
-                      <a:srgbClr val="FFD966"/>
+                      <a:srgbClr val="FFFFFF"/>
                     </a:solidFill>
                   </a:tcPr>
                 </a:tc>
@@ -19306,7 +20125,7 @@
                   </a:tcPr>
                 </a:tc>
               </a:tr>
-              <a:tr h="367200">
+              <a:tr h="280836">
                 <a:tc>
                   <a:txBody>
                     <a:bodyPr/>
@@ -19314,13 +20133,13 @@
                     <a:p>
                       <a:pPr algn="l"/>
                       <a:r>
-                        <a:rPr sz="1200" b="0">
+                        <a:rPr sz="1200" b="1">
                           <a:solidFill>
                             <a:srgbClr val="000000"/>
                           </a:solidFill>
                           <a:latin typeface="Calibri"/>
                         </a:rPr>
-                        <a:t>Documentación técnica y manual de usuario</a:t>
+                        <a:t>Segunda entrega de avance</a:t>
                       </a:r>
                     </a:p>
                   </a:txBody>
@@ -20034,7 +20853,7 @@
                       </a:solidFill>
                     </a:lnB>
                     <a:solidFill>
-                      <a:srgbClr val="FFD966"/>
+                      <a:srgbClr val="FFFFFF"/>
                     </a:solidFill>
                   </a:tcPr>
                 </a:tc>
@@ -20125,7 +20944,7 @@
                   </a:tcPr>
                 </a:tc>
               </a:tr>
-              <a:tr h="367200">
+              <a:tr h="280836">
                 <a:tc>
                   <a:txBody>
                     <a:bodyPr/>
@@ -20139,7 +20958,7 @@
                           </a:solidFill>
                           <a:latin typeface="Calibri"/>
                         </a:rPr>
-                        <a:t>Informe final, video y ensayo de la defensa</a:t>
+                        <a:t>Ajustes segunda presentación</a:t>
                       </a:r>
                     </a:p>
                   </a:txBody>
@@ -20853,7 +21672,826 @@
                       </a:solidFill>
                     </a:lnB>
                     <a:solidFill>
-                      <a:srgbClr val="FFD966"/>
+                      <a:srgbClr val="F4B183"/>
+                    </a:solidFill>
+                  </a:tcPr>
+                </a:tc>
+                <a:tc>
+                  <a:txBody>
+                    <a:bodyPr/>
+                    <a:lstStyle/>
+                    <a:p>
+                      <a:pPr algn="ctr"/>
+                      <a:r>
+                        <a:rPr sz="1000" b="0">
+                          <a:solidFill>
+                            <a:srgbClr val="000000"/>
+                          </a:solidFill>
+                          <a:latin typeface="Calibri"/>
+                        </a:rPr>
+                        <a:t/>
+                      </a:r>
+                    </a:p>
+                  </a:txBody>
+                  <a:tcPr marL="43200" marR="43200" marT="14400" marB="14400" anchor="ctr">
+                    <a:lnL w="6350" cap="flat" cmpd="sng" algn="ctr">
+                      <a:solidFill>
+                        <a:srgbClr val="BFBFBF"/>
+                      </a:solidFill>
+                    </a:lnL>
+                    <a:lnR w="6350" cap="flat" cmpd="sng" algn="ctr">
+                      <a:solidFill>
+                        <a:srgbClr val="BFBFBF"/>
+                      </a:solidFill>
+                    </a:lnR>
+                    <a:lnT w="6350" cap="flat" cmpd="sng" algn="ctr">
+                      <a:solidFill>
+                        <a:srgbClr val="BFBFBF"/>
+                      </a:solidFill>
+                    </a:lnT>
+                    <a:lnB w="6350" cap="flat" cmpd="sng" algn="ctr">
+                      <a:solidFill>
+                        <a:srgbClr val="BFBFBF"/>
+                      </a:solidFill>
+                    </a:lnB>
+                    <a:solidFill>
+                      <a:srgbClr val="FFFFFF"/>
+                    </a:solidFill>
+                  </a:tcPr>
+                </a:tc>
+                <a:tc>
+                  <a:txBody>
+                    <a:bodyPr/>
+                    <a:lstStyle/>
+                    <a:p>
+                      <a:pPr algn="ctr"/>
+                      <a:r>
+                        <a:rPr sz="1000" b="0">
+                          <a:solidFill>
+                            <a:srgbClr val="000000"/>
+                          </a:solidFill>
+                          <a:latin typeface="Calibri"/>
+                        </a:rPr>
+                        <a:t/>
+                      </a:r>
+                    </a:p>
+                  </a:txBody>
+                  <a:tcPr marL="43200" marR="43200" marT="14400" marB="14400" anchor="ctr">
+                    <a:lnL w="6350" cap="flat" cmpd="sng" algn="ctr">
+                      <a:solidFill>
+                        <a:srgbClr val="BFBFBF"/>
+                      </a:solidFill>
+                    </a:lnL>
+                    <a:lnR w="6350" cap="flat" cmpd="sng" algn="ctr">
+                      <a:solidFill>
+                        <a:srgbClr val="BFBFBF"/>
+                      </a:solidFill>
+                    </a:lnR>
+                    <a:lnT w="6350" cap="flat" cmpd="sng" algn="ctr">
+                      <a:solidFill>
+                        <a:srgbClr val="BFBFBF"/>
+                      </a:solidFill>
+                    </a:lnT>
+                    <a:lnB w="6350" cap="flat" cmpd="sng" algn="ctr">
+                      <a:solidFill>
+                        <a:srgbClr val="BFBFBF"/>
+                      </a:solidFill>
+                    </a:lnB>
+                    <a:solidFill>
+                      <a:srgbClr val="FFFFFF"/>
+                    </a:solidFill>
+                  </a:tcPr>
+                </a:tc>
+              </a:tr>
+              <a:tr h="280836">
+                <a:tc>
+                  <a:txBody>
+                    <a:bodyPr/>
+                    <a:lstStyle/>
+                    <a:p>
+                      <a:pPr algn="l"/>
+                      <a:r>
+                        <a:rPr sz="1200" b="1">
+                          <a:solidFill>
+                            <a:srgbClr val="000000"/>
+                          </a:solidFill>
+                          <a:latin typeface="Calibri"/>
+                        </a:rPr>
+                        <a:t>Presentación Final</a:t>
+                      </a:r>
+                    </a:p>
+                  </a:txBody>
+                  <a:tcPr marL="43200" marR="43200" marT="14400" marB="14400" anchor="ctr">
+                    <a:lnL w="6350" cap="flat" cmpd="sng" algn="ctr">
+                      <a:solidFill>
+                        <a:srgbClr val="BFBFBF"/>
+                      </a:solidFill>
+                    </a:lnL>
+                    <a:lnR w="6350" cap="flat" cmpd="sng" algn="ctr">
+                      <a:solidFill>
+                        <a:srgbClr val="BFBFBF"/>
+                      </a:solidFill>
+                    </a:lnR>
+                    <a:lnT w="6350" cap="flat" cmpd="sng" algn="ctr">
+                      <a:solidFill>
+                        <a:srgbClr val="BFBFBF"/>
+                      </a:solidFill>
+                    </a:lnT>
+                    <a:lnB w="6350" cap="flat" cmpd="sng" algn="ctr">
+                      <a:solidFill>
+                        <a:srgbClr val="BFBFBF"/>
+                      </a:solidFill>
+                    </a:lnB>
+                    <a:solidFill>
+                      <a:srgbClr val="FFFFFF"/>
+                    </a:solidFill>
+                  </a:tcPr>
+                </a:tc>
+                <a:tc>
+                  <a:txBody>
+                    <a:bodyPr/>
+                    <a:lstStyle/>
+                    <a:p>
+                      <a:pPr algn="ctr"/>
+                      <a:r>
+                        <a:rPr sz="1000" b="0">
+                          <a:solidFill>
+                            <a:srgbClr val="000000"/>
+                          </a:solidFill>
+                          <a:latin typeface="Calibri"/>
+                        </a:rPr>
+                        <a:t/>
+                      </a:r>
+                    </a:p>
+                  </a:txBody>
+                  <a:tcPr marL="43200" marR="43200" marT="14400" marB="14400" anchor="ctr">
+                    <a:lnL w="6350" cap="flat" cmpd="sng" algn="ctr">
+                      <a:solidFill>
+                        <a:srgbClr val="BFBFBF"/>
+                      </a:solidFill>
+                    </a:lnL>
+                    <a:lnR w="6350" cap="flat" cmpd="sng" algn="ctr">
+                      <a:solidFill>
+                        <a:srgbClr val="BFBFBF"/>
+                      </a:solidFill>
+                    </a:lnR>
+                    <a:lnT w="6350" cap="flat" cmpd="sng" algn="ctr">
+                      <a:solidFill>
+                        <a:srgbClr val="BFBFBF"/>
+                      </a:solidFill>
+                    </a:lnT>
+                    <a:lnB w="6350" cap="flat" cmpd="sng" algn="ctr">
+                      <a:solidFill>
+                        <a:srgbClr val="BFBFBF"/>
+                      </a:solidFill>
+                    </a:lnB>
+                    <a:solidFill>
+                      <a:srgbClr val="FFFFFF"/>
+                    </a:solidFill>
+                  </a:tcPr>
+                </a:tc>
+                <a:tc>
+                  <a:txBody>
+                    <a:bodyPr/>
+                    <a:lstStyle/>
+                    <a:p>
+                      <a:pPr algn="ctr"/>
+                      <a:r>
+                        <a:rPr sz="1000" b="0">
+                          <a:solidFill>
+                            <a:srgbClr val="000000"/>
+                          </a:solidFill>
+                          <a:latin typeface="Calibri"/>
+                        </a:rPr>
+                        <a:t/>
+                      </a:r>
+                    </a:p>
+                  </a:txBody>
+                  <a:tcPr marL="43200" marR="43200" marT="14400" marB="14400" anchor="ctr">
+                    <a:lnL w="6350" cap="flat" cmpd="sng" algn="ctr">
+                      <a:solidFill>
+                        <a:srgbClr val="BFBFBF"/>
+                      </a:solidFill>
+                    </a:lnL>
+                    <a:lnR w="6350" cap="flat" cmpd="sng" algn="ctr">
+                      <a:solidFill>
+                        <a:srgbClr val="BFBFBF"/>
+                      </a:solidFill>
+                    </a:lnR>
+                    <a:lnT w="6350" cap="flat" cmpd="sng" algn="ctr">
+                      <a:solidFill>
+                        <a:srgbClr val="BFBFBF"/>
+                      </a:solidFill>
+                    </a:lnT>
+                    <a:lnB w="6350" cap="flat" cmpd="sng" algn="ctr">
+                      <a:solidFill>
+                        <a:srgbClr val="BFBFBF"/>
+                      </a:solidFill>
+                    </a:lnB>
+                    <a:solidFill>
+                      <a:srgbClr val="FFFFFF"/>
+                    </a:solidFill>
+                  </a:tcPr>
+                </a:tc>
+                <a:tc>
+                  <a:txBody>
+                    <a:bodyPr/>
+                    <a:lstStyle/>
+                    <a:p>
+                      <a:pPr algn="ctr"/>
+                      <a:r>
+                        <a:rPr sz="1000" b="0">
+                          <a:solidFill>
+                            <a:srgbClr val="000000"/>
+                          </a:solidFill>
+                          <a:latin typeface="Calibri"/>
+                        </a:rPr>
+                        <a:t/>
+                      </a:r>
+                    </a:p>
+                  </a:txBody>
+                  <a:tcPr marL="43200" marR="43200" marT="14400" marB="14400" anchor="ctr">
+                    <a:lnL w="6350" cap="flat" cmpd="sng" algn="ctr">
+                      <a:solidFill>
+                        <a:srgbClr val="BFBFBF"/>
+                      </a:solidFill>
+                    </a:lnL>
+                    <a:lnR w="6350" cap="flat" cmpd="sng" algn="ctr">
+                      <a:solidFill>
+                        <a:srgbClr val="BFBFBF"/>
+                      </a:solidFill>
+                    </a:lnR>
+                    <a:lnT w="6350" cap="flat" cmpd="sng" algn="ctr">
+                      <a:solidFill>
+                        <a:srgbClr val="BFBFBF"/>
+                      </a:solidFill>
+                    </a:lnT>
+                    <a:lnB w="6350" cap="flat" cmpd="sng" algn="ctr">
+                      <a:solidFill>
+                        <a:srgbClr val="BFBFBF"/>
+                      </a:solidFill>
+                    </a:lnB>
+                    <a:solidFill>
+                      <a:srgbClr val="FFFFFF"/>
+                    </a:solidFill>
+                  </a:tcPr>
+                </a:tc>
+                <a:tc>
+                  <a:txBody>
+                    <a:bodyPr/>
+                    <a:lstStyle/>
+                    <a:p>
+                      <a:pPr algn="ctr"/>
+                      <a:r>
+                        <a:rPr sz="1000" b="0">
+                          <a:solidFill>
+                            <a:srgbClr val="000000"/>
+                          </a:solidFill>
+                          <a:latin typeface="Calibri"/>
+                        </a:rPr>
+                        <a:t/>
+                      </a:r>
+                    </a:p>
+                  </a:txBody>
+                  <a:tcPr marL="43200" marR="43200" marT="14400" marB="14400" anchor="ctr">
+                    <a:lnL w="6350" cap="flat" cmpd="sng" algn="ctr">
+                      <a:solidFill>
+                        <a:srgbClr val="BFBFBF"/>
+                      </a:solidFill>
+                    </a:lnL>
+                    <a:lnR w="6350" cap="flat" cmpd="sng" algn="ctr">
+                      <a:solidFill>
+                        <a:srgbClr val="BFBFBF"/>
+                      </a:solidFill>
+                    </a:lnR>
+                    <a:lnT w="6350" cap="flat" cmpd="sng" algn="ctr">
+                      <a:solidFill>
+                        <a:srgbClr val="BFBFBF"/>
+                      </a:solidFill>
+                    </a:lnT>
+                    <a:lnB w="6350" cap="flat" cmpd="sng" algn="ctr">
+                      <a:solidFill>
+                        <a:srgbClr val="BFBFBF"/>
+                      </a:solidFill>
+                    </a:lnB>
+                    <a:solidFill>
+                      <a:srgbClr val="FFFFFF"/>
+                    </a:solidFill>
+                  </a:tcPr>
+                </a:tc>
+                <a:tc>
+                  <a:txBody>
+                    <a:bodyPr/>
+                    <a:lstStyle/>
+                    <a:p>
+                      <a:pPr algn="ctr"/>
+                      <a:r>
+                        <a:rPr sz="1000" b="0">
+                          <a:solidFill>
+                            <a:srgbClr val="000000"/>
+                          </a:solidFill>
+                          <a:latin typeface="Calibri"/>
+                        </a:rPr>
+                        <a:t/>
+                      </a:r>
+                    </a:p>
+                  </a:txBody>
+                  <a:tcPr marL="43200" marR="43200" marT="14400" marB="14400" anchor="ctr">
+                    <a:lnL w="6350" cap="flat" cmpd="sng" algn="ctr">
+                      <a:solidFill>
+                        <a:srgbClr val="BFBFBF"/>
+                      </a:solidFill>
+                    </a:lnL>
+                    <a:lnR w="6350" cap="flat" cmpd="sng" algn="ctr">
+                      <a:solidFill>
+                        <a:srgbClr val="BFBFBF"/>
+                      </a:solidFill>
+                    </a:lnR>
+                    <a:lnT w="6350" cap="flat" cmpd="sng" algn="ctr">
+                      <a:solidFill>
+                        <a:srgbClr val="BFBFBF"/>
+                      </a:solidFill>
+                    </a:lnT>
+                    <a:lnB w="6350" cap="flat" cmpd="sng" algn="ctr">
+                      <a:solidFill>
+                        <a:srgbClr val="BFBFBF"/>
+                      </a:solidFill>
+                    </a:lnB>
+                    <a:solidFill>
+                      <a:srgbClr val="FFFFFF"/>
+                    </a:solidFill>
+                  </a:tcPr>
+                </a:tc>
+                <a:tc>
+                  <a:txBody>
+                    <a:bodyPr/>
+                    <a:lstStyle/>
+                    <a:p>
+                      <a:pPr algn="ctr"/>
+                      <a:r>
+                        <a:rPr sz="1000" b="0">
+                          <a:solidFill>
+                            <a:srgbClr val="000000"/>
+                          </a:solidFill>
+                          <a:latin typeface="Calibri"/>
+                        </a:rPr>
+                        <a:t/>
+                      </a:r>
+                    </a:p>
+                  </a:txBody>
+                  <a:tcPr marL="43200" marR="43200" marT="14400" marB="14400" anchor="ctr">
+                    <a:lnL w="6350" cap="flat" cmpd="sng" algn="ctr">
+                      <a:solidFill>
+                        <a:srgbClr val="BFBFBF"/>
+                      </a:solidFill>
+                    </a:lnL>
+                    <a:lnR w="6350" cap="flat" cmpd="sng" algn="ctr">
+                      <a:solidFill>
+                        <a:srgbClr val="BFBFBF"/>
+                      </a:solidFill>
+                    </a:lnR>
+                    <a:lnT w="6350" cap="flat" cmpd="sng" algn="ctr">
+                      <a:solidFill>
+                        <a:srgbClr val="BFBFBF"/>
+                      </a:solidFill>
+                    </a:lnT>
+                    <a:lnB w="6350" cap="flat" cmpd="sng" algn="ctr">
+                      <a:solidFill>
+                        <a:srgbClr val="BFBFBF"/>
+                      </a:solidFill>
+                    </a:lnB>
+                    <a:solidFill>
+                      <a:srgbClr val="FFFFFF"/>
+                    </a:solidFill>
+                  </a:tcPr>
+                </a:tc>
+                <a:tc>
+                  <a:txBody>
+                    <a:bodyPr/>
+                    <a:lstStyle/>
+                    <a:p>
+                      <a:pPr algn="ctr"/>
+                      <a:r>
+                        <a:rPr sz="1000" b="0">
+                          <a:solidFill>
+                            <a:srgbClr val="000000"/>
+                          </a:solidFill>
+                          <a:latin typeface="Calibri"/>
+                        </a:rPr>
+                        <a:t/>
+                      </a:r>
+                    </a:p>
+                  </a:txBody>
+                  <a:tcPr marL="43200" marR="43200" marT="14400" marB="14400" anchor="ctr">
+                    <a:lnL w="6350" cap="flat" cmpd="sng" algn="ctr">
+                      <a:solidFill>
+                        <a:srgbClr val="BFBFBF"/>
+                      </a:solidFill>
+                    </a:lnL>
+                    <a:lnR w="6350" cap="flat" cmpd="sng" algn="ctr">
+                      <a:solidFill>
+                        <a:srgbClr val="BFBFBF"/>
+                      </a:solidFill>
+                    </a:lnR>
+                    <a:lnT w="6350" cap="flat" cmpd="sng" algn="ctr">
+                      <a:solidFill>
+                        <a:srgbClr val="BFBFBF"/>
+                      </a:solidFill>
+                    </a:lnT>
+                    <a:lnB w="6350" cap="flat" cmpd="sng" algn="ctr">
+                      <a:solidFill>
+                        <a:srgbClr val="BFBFBF"/>
+                      </a:solidFill>
+                    </a:lnB>
+                    <a:solidFill>
+                      <a:srgbClr val="FFFFFF"/>
+                    </a:solidFill>
+                  </a:tcPr>
+                </a:tc>
+                <a:tc>
+                  <a:txBody>
+                    <a:bodyPr/>
+                    <a:lstStyle/>
+                    <a:p>
+                      <a:pPr algn="ctr"/>
+                      <a:r>
+                        <a:rPr sz="1000" b="0">
+                          <a:solidFill>
+                            <a:srgbClr val="000000"/>
+                          </a:solidFill>
+                          <a:latin typeface="Calibri"/>
+                        </a:rPr>
+                        <a:t/>
+                      </a:r>
+                    </a:p>
+                  </a:txBody>
+                  <a:tcPr marL="43200" marR="43200" marT="14400" marB="14400" anchor="ctr">
+                    <a:lnL w="6350" cap="flat" cmpd="sng" algn="ctr">
+                      <a:solidFill>
+                        <a:srgbClr val="BFBFBF"/>
+                      </a:solidFill>
+                    </a:lnL>
+                    <a:lnR w="6350" cap="flat" cmpd="sng" algn="ctr">
+                      <a:solidFill>
+                        <a:srgbClr val="BFBFBF"/>
+                      </a:solidFill>
+                    </a:lnR>
+                    <a:lnT w="6350" cap="flat" cmpd="sng" algn="ctr">
+                      <a:solidFill>
+                        <a:srgbClr val="BFBFBF"/>
+                      </a:solidFill>
+                    </a:lnT>
+                    <a:lnB w="6350" cap="flat" cmpd="sng" algn="ctr">
+                      <a:solidFill>
+                        <a:srgbClr val="BFBFBF"/>
+                      </a:solidFill>
+                    </a:lnB>
+                    <a:solidFill>
+                      <a:srgbClr val="FFFFFF"/>
+                    </a:solidFill>
+                  </a:tcPr>
+                </a:tc>
+                <a:tc>
+                  <a:txBody>
+                    <a:bodyPr/>
+                    <a:lstStyle/>
+                    <a:p>
+                      <a:pPr algn="ctr"/>
+                      <a:r>
+                        <a:rPr sz="1000" b="0">
+                          <a:solidFill>
+                            <a:srgbClr val="000000"/>
+                          </a:solidFill>
+                          <a:latin typeface="Calibri"/>
+                        </a:rPr>
+                        <a:t/>
+                      </a:r>
+                    </a:p>
+                  </a:txBody>
+                  <a:tcPr marL="43200" marR="43200" marT="14400" marB="14400" anchor="ctr">
+                    <a:lnL w="6350" cap="flat" cmpd="sng" algn="ctr">
+                      <a:solidFill>
+                        <a:srgbClr val="BFBFBF"/>
+                      </a:solidFill>
+                    </a:lnL>
+                    <a:lnR w="6350" cap="flat" cmpd="sng" algn="ctr">
+                      <a:solidFill>
+                        <a:srgbClr val="BFBFBF"/>
+                      </a:solidFill>
+                    </a:lnR>
+                    <a:lnT w="6350" cap="flat" cmpd="sng" algn="ctr">
+                      <a:solidFill>
+                        <a:srgbClr val="BFBFBF"/>
+                      </a:solidFill>
+                    </a:lnT>
+                    <a:lnB w="6350" cap="flat" cmpd="sng" algn="ctr">
+                      <a:solidFill>
+                        <a:srgbClr val="BFBFBF"/>
+                      </a:solidFill>
+                    </a:lnB>
+                    <a:solidFill>
+                      <a:srgbClr val="FFFFFF"/>
+                    </a:solidFill>
+                  </a:tcPr>
+                </a:tc>
+                <a:tc>
+                  <a:txBody>
+                    <a:bodyPr/>
+                    <a:lstStyle/>
+                    <a:p>
+                      <a:pPr algn="ctr"/>
+                      <a:r>
+                        <a:rPr sz="1000" b="0">
+                          <a:solidFill>
+                            <a:srgbClr val="000000"/>
+                          </a:solidFill>
+                          <a:latin typeface="Calibri"/>
+                        </a:rPr>
+                        <a:t/>
+                      </a:r>
+                    </a:p>
+                  </a:txBody>
+                  <a:tcPr marL="43200" marR="43200" marT="14400" marB="14400" anchor="ctr">
+                    <a:lnL w="6350" cap="flat" cmpd="sng" algn="ctr">
+                      <a:solidFill>
+                        <a:srgbClr val="BFBFBF"/>
+                      </a:solidFill>
+                    </a:lnL>
+                    <a:lnR w="6350" cap="flat" cmpd="sng" algn="ctr">
+                      <a:solidFill>
+                        <a:srgbClr val="BFBFBF"/>
+                      </a:solidFill>
+                    </a:lnR>
+                    <a:lnT w="6350" cap="flat" cmpd="sng" algn="ctr">
+                      <a:solidFill>
+                        <a:srgbClr val="BFBFBF"/>
+                      </a:solidFill>
+                    </a:lnT>
+                    <a:lnB w="6350" cap="flat" cmpd="sng" algn="ctr">
+                      <a:solidFill>
+                        <a:srgbClr val="BFBFBF"/>
+                      </a:solidFill>
+                    </a:lnB>
+                    <a:solidFill>
+                      <a:srgbClr val="FFFFFF"/>
+                    </a:solidFill>
+                  </a:tcPr>
+                </a:tc>
+                <a:tc>
+                  <a:txBody>
+                    <a:bodyPr/>
+                    <a:lstStyle/>
+                    <a:p>
+                      <a:pPr algn="ctr"/>
+                      <a:r>
+                        <a:rPr sz="1000" b="0">
+                          <a:solidFill>
+                            <a:srgbClr val="000000"/>
+                          </a:solidFill>
+                          <a:latin typeface="Calibri"/>
+                        </a:rPr>
+                        <a:t/>
+                      </a:r>
+                    </a:p>
+                  </a:txBody>
+                  <a:tcPr marL="43200" marR="43200" marT="14400" marB="14400" anchor="ctr">
+                    <a:lnL w="6350" cap="flat" cmpd="sng" algn="ctr">
+                      <a:solidFill>
+                        <a:srgbClr val="BFBFBF"/>
+                      </a:solidFill>
+                    </a:lnL>
+                    <a:lnR w="6350" cap="flat" cmpd="sng" algn="ctr">
+                      <a:solidFill>
+                        <a:srgbClr val="BFBFBF"/>
+                      </a:solidFill>
+                    </a:lnR>
+                    <a:lnT w="6350" cap="flat" cmpd="sng" algn="ctr">
+                      <a:solidFill>
+                        <a:srgbClr val="BFBFBF"/>
+                      </a:solidFill>
+                    </a:lnT>
+                    <a:lnB w="6350" cap="flat" cmpd="sng" algn="ctr">
+                      <a:solidFill>
+                        <a:srgbClr val="BFBFBF"/>
+                      </a:solidFill>
+                    </a:lnB>
+                    <a:solidFill>
+                      <a:srgbClr val="FFFFFF"/>
+                    </a:solidFill>
+                  </a:tcPr>
+                </a:tc>
+                <a:tc>
+                  <a:txBody>
+                    <a:bodyPr/>
+                    <a:lstStyle/>
+                    <a:p>
+                      <a:pPr algn="ctr"/>
+                      <a:r>
+                        <a:rPr sz="1000" b="0">
+                          <a:solidFill>
+                            <a:srgbClr val="000000"/>
+                          </a:solidFill>
+                          <a:latin typeface="Calibri"/>
+                        </a:rPr>
+                        <a:t/>
+                      </a:r>
+                    </a:p>
+                  </a:txBody>
+                  <a:tcPr marL="43200" marR="43200" marT="14400" marB="14400" anchor="ctr">
+                    <a:lnL w="6350" cap="flat" cmpd="sng" algn="ctr">
+                      <a:solidFill>
+                        <a:srgbClr val="BFBFBF"/>
+                      </a:solidFill>
+                    </a:lnL>
+                    <a:lnR w="6350" cap="flat" cmpd="sng" algn="ctr">
+                      <a:solidFill>
+                        <a:srgbClr val="BFBFBF"/>
+                      </a:solidFill>
+                    </a:lnR>
+                    <a:lnT w="6350" cap="flat" cmpd="sng" algn="ctr">
+                      <a:solidFill>
+                        <a:srgbClr val="BFBFBF"/>
+                      </a:solidFill>
+                    </a:lnT>
+                    <a:lnB w="6350" cap="flat" cmpd="sng" algn="ctr">
+                      <a:solidFill>
+                        <a:srgbClr val="BFBFBF"/>
+                      </a:solidFill>
+                    </a:lnB>
+                    <a:solidFill>
+                      <a:srgbClr val="FFFFFF"/>
+                    </a:solidFill>
+                  </a:tcPr>
+                </a:tc>
+                <a:tc>
+                  <a:txBody>
+                    <a:bodyPr/>
+                    <a:lstStyle/>
+                    <a:p>
+                      <a:pPr algn="ctr"/>
+                      <a:r>
+                        <a:rPr sz="1000" b="0">
+                          <a:solidFill>
+                            <a:srgbClr val="000000"/>
+                          </a:solidFill>
+                          <a:latin typeface="Calibri"/>
+                        </a:rPr>
+                        <a:t/>
+                      </a:r>
+                    </a:p>
+                  </a:txBody>
+                  <a:tcPr marL="43200" marR="43200" marT="14400" marB="14400" anchor="ctr">
+                    <a:lnL w="6350" cap="flat" cmpd="sng" algn="ctr">
+                      <a:solidFill>
+                        <a:srgbClr val="BFBFBF"/>
+                      </a:solidFill>
+                    </a:lnL>
+                    <a:lnR w="6350" cap="flat" cmpd="sng" algn="ctr">
+                      <a:solidFill>
+                        <a:srgbClr val="BFBFBF"/>
+                      </a:solidFill>
+                    </a:lnR>
+                    <a:lnT w="6350" cap="flat" cmpd="sng" algn="ctr">
+                      <a:solidFill>
+                        <a:srgbClr val="BFBFBF"/>
+                      </a:solidFill>
+                    </a:lnT>
+                    <a:lnB w="6350" cap="flat" cmpd="sng" algn="ctr">
+                      <a:solidFill>
+                        <a:srgbClr val="BFBFBF"/>
+                      </a:solidFill>
+                    </a:lnB>
+                    <a:solidFill>
+                      <a:srgbClr val="FFFFFF"/>
+                    </a:solidFill>
+                  </a:tcPr>
+                </a:tc>
+                <a:tc>
+                  <a:txBody>
+                    <a:bodyPr/>
+                    <a:lstStyle/>
+                    <a:p>
+                      <a:pPr algn="ctr"/>
+                      <a:r>
+                        <a:rPr sz="1000" b="0">
+                          <a:solidFill>
+                            <a:srgbClr val="000000"/>
+                          </a:solidFill>
+                          <a:latin typeface="Calibri"/>
+                        </a:rPr>
+                        <a:t/>
+                      </a:r>
+                    </a:p>
+                  </a:txBody>
+                  <a:tcPr marL="43200" marR="43200" marT="14400" marB="14400" anchor="ctr">
+                    <a:lnL w="6350" cap="flat" cmpd="sng" algn="ctr">
+                      <a:solidFill>
+                        <a:srgbClr val="BFBFBF"/>
+                      </a:solidFill>
+                    </a:lnL>
+                    <a:lnR w="6350" cap="flat" cmpd="sng" algn="ctr">
+                      <a:solidFill>
+                        <a:srgbClr val="BFBFBF"/>
+                      </a:solidFill>
+                    </a:lnR>
+                    <a:lnT w="6350" cap="flat" cmpd="sng" algn="ctr">
+                      <a:solidFill>
+                        <a:srgbClr val="BFBFBF"/>
+                      </a:solidFill>
+                    </a:lnT>
+                    <a:lnB w="6350" cap="flat" cmpd="sng" algn="ctr">
+                      <a:solidFill>
+                        <a:srgbClr val="BFBFBF"/>
+                      </a:solidFill>
+                    </a:lnB>
+                    <a:solidFill>
+                      <a:srgbClr val="FFFFFF"/>
+                    </a:solidFill>
+                  </a:tcPr>
+                </a:tc>
+                <a:tc>
+                  <a:txBody>
+                    <a:bodyPr/>
+                    <a:lstStyle/>
+                    <a:p>
+                      <a:pPr algn="ctr"/>
+                      <a:r>
+                        <a:rPr sz="1000" b="0">
+                          <a:solidFill>
+                            <a:srgbClr val="000000"/>
+                          </a:solidFill>
+                          <a:latin typeface="Calibri"/>
+                        </a:rPr>
+                        <a:t/>
+                      </a:r>
+                    </a:p>
+                  </a:txBody>
+                  <a:tcPr marL="43200" marR="43200" marT="14400" marB="14400" anchor="ctr">
+                    <a:lnL w="6350" cap="flat" cmpd="sng" algn="ctr">
+                      <a:solidFill>
+                        <a:srgbClr val="BFBFBF"/>
+                      </a:solidFill>
+                    </a:lnL>
+                    <a:lnR w="6350" cap="flat" cmpd="sng" algn="ctr">
+                      <a:solidFill>
+                        <a:srgbClr val="BFBFBF"/>
+                      </a:solidFill>
+                    </a:lnR>
+                    <a:lnT w="6350" cap="flat" cmpd="sng" algn="ctr">
+                      <a:solidFill>
+                        <a:srgbClr val="BFBFBF"/>
+                      </a:solidFill>
+                    </a:lnT>
+                    <a:lnB w="6350" cap="flat" cmpd="sng" algn="ctr">
+                      <a:solidFill>
+                        <a:srgbClr val="BFBFBF"/>
+                      </a:solidFill>
+                    </a:lnB>
+                    <a:solidFill>
+                      <a:srgbClr val="FFFFFF"/>
+                    </a:solidFill>
+                  </a:tcPr>
+                </a:tc>
+                <a:tc>
+                  <a:txBody>
+                    <a:bodyPr/>
+                    <a:lstStyle/>
+                    <a:p>
+                      <a:pPr algn="ctr"/>
+                      <a:r>
+                        <a:rPr sz="1000" b="0">
+                          <a:solidFill>
+                            <a:srgbClr val="000000"/>
+                          </a:solidFill>
+                          <a:latin typeface="Calibri"/>
+                        </a:rPr>
+                        <a:t/>
+                      </a:r>
+                    </a:p>
+                  </a:txBody>
+                  <a:tcPr marL="43200" marR="43200" marT="14400" marB="14400" anchor="ctr">
+                    <a:lnL w="6350" cap="flat" cmpd="sng" algn="ctr">
+                      <a:solidFill>
+                        <a:srgbClr val="BFBFBF"/>
+                      </a:solidFill>
+                    </a:lnL>
+                    <a:lnR w="6350" cap="flat" cmpd="sng" algn="ctr">
+                      <a:solidFill>
+                        <a:srgbClr val="BFBFBF"/>
+                      </a:solidFill>
+                    </a:lnR>
+                    <a:lnT w="6350" cap="flat" cmpd="sng" algn="ctr">
+                      <a:solidFill>
+                        <a:srgbClr val="BFBFBF"/>
+                      </a:solidFill>
+                    </a:lnT>
+                    <a:lnB w="6350" cap="flat" cmpd="sng" algn="ctr">
+                      <a:solidFill>
+                        <a:srgbClr val="BFBFBF"/>
+                      </a:solidFill>
+                    </a:lnB>
+                    <a:solidFill>
+                      <a:srgbClr val="FFFFFF"/>
                     </a:solidFill>
                   </a:tcPr>
                 </a:tc>
@@ -20996,7 +22634,7 @@
                 </a:solidFill>
                 <a:latin typeface="Calibri"/>
               </a:rPr>
-              <a:t>Hitos del ramo:  informe de avance el 16 de octubre (semana 10)  ·  informe final el 20 de noviembre (semana 15)  ·  defensa el 4 de diciembre de 2026 (semana 18).</a:t>
+              <a:t>Hitos:  primera entrega de avance en la semana 11  ·  segunda entrega de avance en la semana 15  ·  presentación final en las semanas 17 y 18.</a:t>
             </a:r>
           </a:p>
         </p:txBody>
@@ -21723,7 +23361,7 @@
                 </a:solidFill>
                 <a:latin typeface="Calibri"/>
               </a:rPr>
-              <a:t>CJ</a:t>
+              <a:t>MJ</a:t>
             </a:r>
           </a:p>
         </p:txBody>
@@ -21776,7 +23414,7 @@
                 </a:solidFill>
                 <a:latin typeface="Calibri"/>
               </a:rPr>
-              <a:t>Cristian Jorquera</a:t>
+              <a:t>Manuel Jansen</a:t>
             </a:r>
           </a:p>
         </p:txBody>
@@ -21829,7 +23467,7 @@
                 </a:solidFill>
                 <a:latin typeface="Calibri"/>
               </a:rPr>
-              <a:t>Aseguramiento de calidad, historias de usuario</a:t>
+              <a:t>Diseño de interfaz y mockups</a:t>
             </a:r>
           </a:p>
           <a:p>
@@ -21845,7 +23483,7 @@
                 </a:solidFill>
                 <a:latin typeface="Calibri"/>
               </a:rPr>
-              <a:t>cr.jorquerag@duocuc.cl</a:t>
+              <a:t>ma.jansen@duocuc.cl</a:t>
             </a:r>
           </a:p>
         </p:txBody>
@@ -21946,7 +23584,7 @@
                 </a:solidFill>
                 <a:latin typeface="Calibri"/>
               </a:rPr>
-              <a:t>MJ</a:t>
+              <a:t>CJ</a:t>
             </a:r>
           </a:p>
         </p:txBody>
@@ -21999,7 +23637,7 @@
                 </a:solidFill>
                 <a:latin typeface="Calibri"/>
               </a:rPr>
-              <a:t>Manuel Jansen</a:t>
+              <a:t>Cristian Jorquera</a:t>
             </a:r>
           </a:p>
         </p:txBody>
@@ -22052,7 +23690,7 @@
                 </a:solidFill>
                 <a:latin typeface="Calibri"/>
               </a:rPr>
-              <a:t>Diseño de interfaz y mockups</a:t>
+              <a:t>Aseguramiento de calidad, historias de usuario</a:t>
             </a:r>
           </a:p>
           <a:p>
@@ -22068,7 +23706,7 @@
                 </a:solidFill>
                 <a:latin typeface="Calibri"/>
               </a:rPr>
-              <a:t>ma.jansen@duocuc.cl</a:t>
+              <a:t>cr.jorquerag@duocuc.cl</a:t>
             </a:r>
           </a:p>
         </p:txBody>
@@ -24344,7 +25982,7 @@
                 </a:solidFill>
                 <a:latin typeface="Calibri"/>
               </a:rPr>
-              <a:t>1 de 2 · definición y primera mitad del desarrollo</a:t>
+              <a:t>1 de 2 · planificación y primera mitad del desarrollo (semanas 1 a 9)</a:t>
             </a:r>
           </a:p>
         </p:txBody>
@@ -24385,7 +26023,7 @@
         </p:nvGraphicFramePr>
         <p:xfrm>
           <a:off x="684000" y="2448000"/>
-          <a:ext cx="10835982" cy="2736000"/>
+          <a:ext cx="10835982" cy="3024000"/>
         </p:xfrm>
         <a:graphic>
           <a:graphicData uri="http://schemas.openxmlformats.org/drawingml/2006/table">
@@ -24414,7 +26052,7 @@
                 <a:gridCol w="413999"/>
                 <a:gridCol w="413999"/>
               </a:tblGrid>
-              <a:tr h="295200">
+              <a:tr h="539712">
                 <a:tc>
                   <a:txBody>
                     <a:bodyPr/>
@@ -24465,13 +26103,13 @@
                     <a:p>
                       <a:pPr algn="ctr"/>
                       <a:r>
-                        <a:rPr sz="1200" b="1">
+                        <a:rPr sz="1100" b="1">
                           <a:solidFill>
                             <a:srgbClr val="000000"/>
                           </a:solidFill>
                           <a:latin typeface="Calibri"/>
                         </a:rPr>
-                        <a:t>Fase 1</a:t>
+                        <a:t>Fase 1: Planificación</a:t>
                       </a:r>
                     </a:p>
                   </a:txBody>
@@ -24630,20 +26268,20 @@
                     </a:solidFill>
                   </a:tcPr>
                 </a:tc>
-                <a:tc gridSpan="12">
+                <a:tc gridSpan="11">
                   <a:txBody>
                     <a:bodyPr/>
                     <a:lstStyle/>
                     <a:p>
                       <a:pPr algn="ctr"/>
                       <a:r>
-                        <a:rPr sz="1200" b="1">
+                        <a:rPr sz="1100" b="1">
                           <a:solidFill>
                             <a:srgbClr val="000000"/>
                           </a:solidFill>
                           <a:latin typeface="Calibri"/>
                         </a:rPr>
-                        <a:t>Fase 2</a:t>
+                        <a:t>Fase 2: Desarrollo del proyecto</a:t>
                       </a:r>
                     </a:p>
                   </a:txBody>
@@ -25103,6 +26741,49 @@
                     </a:solidFill>
                   </a:tcPr>
                 </a:tc>
+                <a:tc gridSpan="3">
+                  <a:txBody>
+                    <a:bodyPr/>
+                    <a:lstStyle/>
+                    <a:p>
+                      <a:pPr algn="ctr"/>
+                      <a:r>
+                        <a:rPr sz="1100" b="1">
+                          <a:solidFill>
+                            <a:srgbClr val="000000"/>
+                          </a:solidFill>
+                          <a:latin typeface="Calibri"/>
+                        </a:rPr>
+                        <a:t>Fase 3: Presentación Final</a:t>
+                      </a:r>
+                    </a:p>
+                  </a:txBody>
+                  <a:tcPr marL="43200" marR="43200" marT="14400" marB="14400" anchor="ctr">
+                    <a:lnL w="6350" cap="flat" cmpd="sng" algn="ctr">
+                      <a:solidFill>
+                        <a:srgbClr val="BFBFBF"/>
+                      </a:solidFill>
+                    </a:lnL>
+                    <a:lnR w="6350" cap="flat" cmpd="sng" algn="ctr">
+                      <a:solidFill>
+                        <a:srgbClr val="BFBFBF"/>
+                      </a:solidFill>
+                    </a:lnR>
+                    <a:lnT w="6350" cap="flat" cmpd="sng" algn="ctr">
+                      <a:solidFill>
+                        <a:srgbClr val="BFBFBF"/>
+                      </a:solidFill>
+                    </a:lnT>
+                    <a:lnB w="6350" cap="flat" cmpd="sng" algn="ctr">
+                      <a:solidFill>
+                        <a:srgbClr val="BFBFBF"/>
+                      </a:solidFill>
+                    </a:lnB>
+                    <a:solidFill>
+                      <a:srgbClr val="FBE4D5"/>
+                    </a:solidFill>
+                  </a:tcPr>
+                </a:tc>
                 <a:tc hMerge="1">
                   <a:txBody>
                     <a:bodyPr/>
@@ -25117,49 +26798,6 @@
                           <a:latin typeface="Calibri"/>
                         </a:rPr>
                         <a:t/>
-                      </a:r>
-                    </a:p>
-                  </a:txBody>
-                  <a:tcPr marL="43200" marR="43200" marT="14400" marB="14400" anchor="ctr">
-                    <a:lnL w="6350" cap="flat" cmpd="sng" algn="ctr">
-                      <a:solidFill>
-                        <a:srgbClr val="BFBFBF"/>
-                      </a:solidFill>
-                    </a:lnL>
-                    <a:lnR w="6350" cap="flat" cmpd="sng" algn="ctr">
-                      <a:solidFill>
-                        <a:srgbClr val="BFBFBF"/>
-                      </a:solidFill>
-                    </a:lnR>
-                    <a:lnT w="6350" cap="flat" cmpd="sng" algn="ctr">
-                      <a:solidFill>
-                        <a:srgbClr val="BFBFBF"/>
-                      </a:solidFill>
-                    </a:lnT>
-                    <a:lnB w="6350" cap="flat" cmpd="sng" algn="ctr">
-                      <a:solidFill>
-                        <a:srgbClr val="BFBFBF"/>
-                      </a:solidFill>
-                    </a:lnB>
-                    <a:solidFill>
-                      <a:srgbClr val="FFF2CC"/>
-                    </a:solidFill>
-                  </a:tcPr>
-                </a:tc>
-                <a:tc gridSpan="2">
-                  <a:txBody>
-                    <a:bodyPr/>
-                    <a:lstStyle/>
-                    <a:p>
-                      <a:pPr algn="ctr"/>
-                      <a:r>
-                        <a:rPr sz="1200" b="1">
-                          <a:solidFill>
-                            <a:srgbClr val="000000"/>
-                          </a:solidFill>
-                          <a:latin typeface="Calibri"/>
-                        </a:rPr>
-                        <a:t>Fase 3</a:t>
                       </a:r>
                     </a:p>
                   </a:txBody>
@@ -26052,7 +27690,7 @@
                   </a:tcPr>
                 </a:tc>
               </a:tr>
-              <a:tr h="367200">
+              <a:tr h="262944">
                 <a:tc>
                   <a:txBody>
                     <a:bodyPr/>
@@ -26066,7 +27704,7 @@
                           </a:solidFill>
                           <a:latin typeface="Calibri"/>
                         </a:rPr>
-                        <a:t>Definición del proyecto, objetivos y alcance</a:t>
+                        <a:t>Conformación de grupo</a:t>
                       </a:r>
                     </a:p>
                   </a:txBody>
@@ -26178,7 +27816,783 @@
                       </a:solidFill>
                     </a:lnB>
                     <a:solidFill>
-                      <a:srgbClr val="A9D08E"/>
+                      <a:srgbClr val="FFFFFF"/>
+                    </a:solidFill>
+                  </a:tcPr>
+                </a:tc>
+                <a:tc>
+                  <a:txBody>
+                    <a:bodyPr/>
+                    <a:lstStyle/>
+                    <a:p>
+                      <a:pPr algn="ctr"/>
+                      <a:r>
+                        <a:rPr sz="1000" b="0">
+                          <a:solidFill>
+                            <a:srgbClr val="000000"/>
+                          </a:solidFill>
+                          <a:latin typeface="Calibri"/>
+                        </a:rPr>
+                        <a:t/>
+                      </a:r>
+                    </a:p>
+                  </a:txBody>
+                  <a:tcPr marL="43200" marR="43200" marT="14400" marB="14400" anchor="ctr">
+                    <a:lnL w="6350" cap="flat" cmpd="sng" algn="ctr">
+                      <a:solidFill>
+                        <a:srgbClr val="BFBFBF"/>
+                      </a:solidFill>
+                    </a:lnL>
+                    <a:lnR w="6350" cap="flat" cmpd="sng" algn="ctr">
+                      <a:solidFill>
+                        <a:srgbClr val="BFBFBF"/>
+                      </a:solidFill>
+                    </a:lnR>
+                    <a:lnT w="6350" cap="flat" cmpd="sng" algn="ctr">
+                      <a:solidFill>
+                        <a:srgbClr val="BFBFBF"/>
+                      </a:solidFill>
+                    </a:lnT>
+                    <a:lnB w="6350" cap="flat" cmpd="sng" algn="ctr">
+                      <a:solidFill>
+                        <a:srgbClr val="BFBFBF"/>
+                      </a:solidFill>
+                    </a:lnB>
+                    <a:solidFill>
+                      <a:srgbClr val="FFFFFF"/>
+                    </a:solidFill>
+                  </a:tcPr>
+                </a:tc>
+                <a:tc>
+                  <a:txBody>
+                    <a:bodyPr/>
+                    <a:lstStyle/>
+                    <a:p>
+                      <a:pPr algn="ctr"/>
+                      <a:r>
+                        <a:rPr sz="1000" b="0">
+                          <a:solidFill>
+                            <a:srgbClr val="000000"/>
+                          </a:solidFill>
+                          <a:latin typeface="Calibri"/>
+                        </a:rPr>
+                        <a:t/>
+                      </a:r>
+                    </a:p>
+                  </a:txBody>
+                  <a:tcPr marL="43200" marR="43200" marT="14400" marB="14400" anchor="ctr">
+                    <a:lnL w="6350" cap="flat" cmpd="sng" algn="ctr">
+                      <a:solidFill>
+                        <a:srgbClr val="BFBFBF"/>
+                      </a:solidFill>
+                    </a:lnL>
+                    <a:lnR w="6350" cap="flat" cmpd="sng" algn="ctr">
+                      <a:solidFill>
+                        <a:srgbClr val="BFBFBF"/>
+                      </a:solidFill>
+                    </a:lnR>
+                    <a:lnT w="6350" cap="flat" cmpd="sng" algn="ctr">
+                      <a:solidFill>
+                        <a:srgbClr val="BFBFBF"/>
+                      </a:solidFill>
+                    </a:lnT>
+                    <a:lnB w="6350" cap="flat" cmpd="sng" algn="ctr">
+                      <a:solidFill>
+                        <a:srgbClr val="BFBFBF"/>
+                      </a:solidFill>
+                    </a:lnB>
+                    <a:solidFill>
+                      <a:srgbClr val="FFFFFF"/>
+                    </a:solidFill>
+                  </a:tcPr>
+                </a:tc>
+                <a:tc>
+                  <a:txBody>
+                    <a:bodyPr/>
+                    <a:lstStyle/>
+                    <a:p>
+                      <a:pPr algn="ctr"/>
+                      <a:r>
+                        <a:rPr sz="1000" b="0">
+                          <a:solidFill>
+                            <a:srgbClr val="000000"/>
+                          </a:solidFill>
+                          <a:latin typeface="Calibri"/>
+                        </a:rPr>
+                        <a:t/>
+                      </a:r>
+                    </a:p>
+                  </a:txBody>
+                  <a:tcPr marL="43200" marR="43200" marT="14400" marB="14400" anchor="ctr">
+                    <a:lnL w="6350" cap="flat" cmpd="sng" algn="ctr">
+                      <a:solidFill>
+                        <a:srgbClr val="BFBFBF"/>
+                      </a:solidFill>
+                    </a:lnL>
+                    <a:lnR w="6350" cap="flat" cmpd="sng" algn="ctr">
+                      <a:solidFill>
+                        <a:srgbClr val="BFBFBF"/>
+                      </a:solidFill>
+                    </a:lnR>
+                    <a:lnT w="6350" cap="flat" cmpd="sng" algn="ctr">
+                      <a:solidFill>
+                        <a:srgbClr val="BFBFBF"/>
+                      </a:solidFill>
+                    </a:lnT>
+                    <a:lnB w="6350" cap="flat" cmpd="sng" algn="ctr">
+                      <a:solidFill>
+                        <a:srgbClr val="BFBFBF"/>
+                      </a:solidFill>
+                    </a:lnB>
+                    <a:solidFill>
+                      <a:srgbClr val="FFFFFF"/>
+                    </a:solidFill>
+                  </a:tcPr>
+                </a:tc>
+                <a:tc>
+                  <a:txBody>
+                    <a:bodyPr/>
+                    <a:lstStyle/>
+                    <a:p>
+                      <a:pPr algn="ctr"/>
+                      <a:r>
+                        <a:rPr sz="1000" b="0">
+                          <a:solidFill>
+                            <a:srgbClr val="000000"/>
+                          </a:solidFill>
+                          <a:latin typeface="Calibri"/>
+                        </a:rPr>
+                        <a:t/>
+                      </a:r>
+                    </a:p>
+                  </a:txBody>
+                  <a:tcPr marL="43200" marR="43200" marT="14400" marB="14400" anchor="ctr">
+                    <a:lnL w="6350" cap="flat" cmpd="sng" algn="ctr">
+                      <a:solidFill>
+                        <a:srgbClr val="BFBFBF"/>
+                      </a:solidFill>
+                    </a:lnL>
+                    <a:lnR w="6350" cap="flat" cmpd="sng" algn="ctr">
+                      <a:solidFill>
+                        <a:srgbClr val="BFBFBF"/>
+                      </a:solidFill>
+                    </a:lnR>
+                    <a:lnT w="6350" cap="flat" cmpd="sng" algn="ctr">
+                      <a:solidFill>
+                        <a:srgbClr val="BFBFBF"/>
+                      </a:solidFill>
+                    </a:lnT>
+                    <a:lnB w="6350" cap="flat" cmpd="sng" algn="ctr">
+                      <a:solidFill>
+                        <a:srgbClr val="BFBFBF"/>
+                      </a:solidFill>
+                    </a:lnB>
+                    <a:solidFill>
+                      <a:srgbClr val="FFFFFF"/>
+                    </a:solidFill>
+                  </a:tcPr>
+                </a:tc>
+                <a:tc>
+                  <a:txBody>
+                    <a:bodyPr/>
+                    <a:lstStyle/>
+                    <a:p>
+                      <a:pPr algn="ctr"/>
+                      <a:r>
+                        <a:rPr sz="1000" b="0">
+                          <a:solidFill>
+                            <a:srgbClr val="000000"/>
+                          </a:solidFill>
+                          <a:latin typeface="Calibri"/>
+                        </a:rPr>
+                        <a:t/>
+                      </a:r>
+                    </a:p>
+                  </a:txBody>
+                  <a:tcPr marL="43200" marR="43200" marT="14400" marB="14400" anchor="ctr">
+                    <a:lnL w="6350" cap="flat" cmpd="sng" algn="ctr">
+                      <a:solidFill>
+                        <a:srgbClr val="BFBFBF"/>
+                      </a:solidFill>
+                    </a:lnL>
+                    <a:lnR w="6350" cap="flat" cmpd="sng" algn="ctr">
+                      <a:solidFill>
+                        <a:srgbClr val="BFBFBF"/>
+                      </a:solidFill>
+                    </a:lnR>
+                    <a:lnT w="6350" cap="flat" cmpd="sng" algn="ctr">
+                      <a:solidFill>
+                        <a:srgbClr val="BFBFBF"/>
+                      </a:solidFill>
+                    </a:lnT>
+                    <a:lnB w="6350" cap="flat" cmpd="sng" algn="ctr">
+                      <a:solidFill>
+                        <a:srgbClr val="BFBFBF"/>
+                      </a:solidFill>
+                    </a:lnB>
+                    <a:solidFill>
+                      <a:srgbClr val="FFFFFF"/>
+                    </a:solidFill>
+                  </a:tcPr>
+                </a:tc>
+                <a:tc>
+                  <a:txBody>
+                    <a:bodyPr/>
+                    <a:lstStyle/>
+                    <a:p>
+                      <a:pPr algn="ctr"/>
+                      <a:r>
+                        <a:rPr sz="1000" b="0">
+                          <a:solidFill>
+                            <a:srgbClr val="000000"/>
+                          </a:solidFill>
+                          <a:latin typeface="Calibri"/>
+                        </a:rPr>
+                        <a:t/>
+                      </a:r>
+                    </a:p>
+                  </a:txBody>
+                  <a:tcPr marL="43200" marR="43200" marT="14400" marB="14400" anchor="ctr">
+                    <a:lnL w="6350" cap="flat" cmpd="sng" algn="ctr">
+                      <a:solidFill>
+                        <a:srgbClr val="BFBFBF"/>
+                      </a:solidFill>
+                    </a:lnL>
+                    <a:lnR w="6350" cap="flat" cmpd="sng" algn="ctr">
+                      <a:solidFill>
+                        <a:srgbClr val="BFBFBF"/>
+                      </a:solidFill>
+                    </a:lnR>
+                    <a:lnT w="6350" cap="flat" cmpd="sng" algn="ctr">
+                      <a:solidFill>
+                        <a:srgbClr val="BFBFBF"/>
+                      </a:solidFill>
+                    </a:lnT>
+                    <a:lnB w="6350" cap="flat" cmpd="sng" algn="ctr">
+                      <a:solidFill>
+                        <a:srgbClr val="BFBFBF"/>
+                      </a:solidFill>
+                    </a:lnB>
+                    <a:solidFill>
+                      <a:srgbClr val="FFFFFF"/>
+                    </a:solidFill>
+                  </a:tcPr>
+                </a:tc>
+                <a:tc>
+                  <a:txBody>
+                    <a:bodyPr/>
+                    <a:lstStyle/>
+                    <a:p>
+                      <a:pPr algn="ctr"/>
+                      <a:r>
+                        <a:rPr sz="1000" b="0">
+                          <a:solidFill>
+                            <a:srgbClr val="000000"/>
+                          </a:solidFill>
+                          <a:latin typeface="Calibri"/>
+                        </a:rPr>
+                        <a:t/>
+                      </a:r>
+                    </a:p>
+                  </a:txBody>
+                  <a:tcPr marL="43200" marR="43200" marT="14400" marB="14400" anchor="ctr">
+                    <a:lnL w="6350" cap="flat" cmpd="sng" algn="ctr">
+                      <a:solidFill>
+                        <a:srgbClr val="BFBFBF"/>
+                      </a:solidFill>
+                    </a:lnL>
+                    <a:lnR w="6350" cap="flat" cmpd="sng" algn="ctr">
+                      <a:solidFill>
+                        <a:srgbClr val="BFBFBF"/>
+                      </a:solidFill>
+                    </a:lnR>
+                    <a:lnT w="6350" cap="flat" cmpd="sng" algn="ctr">
+                      <a:solidFill>
+                        <a:srgbClr val="BFBFBF"/>
+                      </a:solidFill>
+                    </a:lnT>
+                    <a:lnB w="6350" cap="flat" cmpd="sng" algn="ctr">
+                      <a:solidFill>
+                        <a:srgbClr val="BFBFBF"/>
+                      </a:solidFill>
+                    </a:lnB>
+                    <a:solidFill>
+                      <a:srgbClr val="FFFFFF"/>
+                    </a:solidFill>
+                  </a:tcPr>
+                </a:tc>
+                <a:tc>
+                  <a:txBody>
+                    <a:bodyPr/>
+                    <a:lstStyle/>
+                    <a:p>
+                      <a:pPr algn="ctr"/>
+                      <a:r>
+                        <a:rPr sz="1000" b="0">
+                          <a:solidFill>
+                            <a:srgbClr val="000000"/>
+                          </a:solidFill>
+                          <a:latin typeface="Calibri"/>
+                        </a:rPr>
+                        <a:t/>
+                      </a:r>
+                    </a:p>
+                  </a:txBody>
+                  <a:tcPr marL="43200" marR="43200" marT="14400" marB="14400" anchor="ctr">
+                    <a:lnL w="6350" cap="flat" cmpd="sng" algn="ctr">
+                      <a:solidFill>
+                        <a:srgbClr val="BFBFBF"/>
+                      </a:solidFill>
+                    </a:lnL>
+                    <a:lnR w="6350" cap="flat" cmpd="sng" algn="ctr">
+                      <a:solidFill>
+                        <a:srgbClr val="BFBFBF"/>
+                      </a:solidFill>
+                    </a:lnR>
+                    <a:lnT w="6350" cap="flat" cmpd="sng" algn="ctr">
+                      <a:solidFill>
+                        <a:srgbClr val="BFBFBF"/>
+                      </a:solidFill>
+                    </a:lnT>
+                    <a:lnB w="6350" cap="flat" cmpd="sng" algn="ctr">
+                      <a:solidFill>
+                        <a:srgbClr val="BFBFBF"/>
+                      </a:solidFill>
+                    </a:lnB>
+                    <a:solidFill>
+                      <a:srgbClr val="FFFFFF"/>
+                    </a:solidFill>
+                  </a:tcPr>
+                </a:tc>
+                <a:tc>
+                  <a:txBody>
+                    <a:bodyPr/>
+                    <a:lstStyle/>
+                    <a:p>
+                      <a:pPr algn="ctr"/>
+                      <a:r>
+                        <a:rPr sz="1000" b="0">
+                          <a:solidFill>
+                            <a:srgbClr val="000000"/>
+                          </a:solidFill>
+                          <a:latin typeface="Calibri"/>
+                        </a:rPr>
+                        <a:t/>
+                      </a:r>
+                    </a:p>
+                  </a:txBody>
+                  <a:tcPr marL="43200" marR="43200" marT="14400" marB="14400" anchor="ctr">
+                    <a:lnL w="6350" cap="flat" cmpd="sng" algn="ctr">
+                      <a:solidFill>
+                        <a:srgbClr val="BFBFBF"/>
+                      </a:solidFill>
+                    </a:lnL>
+                    <a:lnR w="6350" cap="flat" cmpd="sng" algn="ctr">
+                      <a:solidFill>
+                        <a:srgbClr val="BFBFBF"/>
+                      </a:solidFill>
+                    </a:lnR>
+                    <a:lnT w="6350" cap="flat" cmpd="sng" algn="ctr">
+                      <a:solidFill>
+                        <a:srgbClr val="BFBFBF"/>
+                      </a:solidFill>
+                    </a:lnT>
+                    <a:lnB w="6350" cap="flat" cmpd="sng" algn="ctr">
+                      <a:solidFill>
+                        <a:srgbClr val="BFBFBF"/>
+                      </a:solidFill>
+                    </a:lnB>
+                    <a:solidFill>
+                      <a:srgbClr val="FFFFFF"/>
+                    </a:solidFill>
+                  </a:tcPr>
+                </a:tc>
+                <a:tc>
+                  <a:txBody>
+                    <a:bodyPr/>
+                    <a:lstStyle/>
+                    <a:p>
+                      <a:pPr algn="ctr"/>
+                      <a:r>
+                        <a:rPr sz="1000" b="0">
+                          <a:solidFill>
+                            <a:srgbClr val="000000"/>
+                          </a:solidFill>
+                          <a:latin typeface="Calibri"/>
+                        </a:rPr>
+                        <a:t/>
+                      </a:r>
+                    </a:p>
+                  </a:txBody>
+                  <a:tcPr marL="43200" marR="43200" marT="14400" marB="14400" anchor="ctr">
+                    <a:lnL w="6350" cap="flat" cmpd="sng" algn="ctr">
+                      <a:solidFill>
+                        <a:srgbClr val="BFBFBF"/>
+                      </a:solidFill>
+                    </a:lnL>
+                    <a:lnR w="6350" cap="flat" cmpd="sng" algn="ctr">
+                      <a:solidFill>
+                        <a:srgbClr val="BFBFBF"/>
+                      </a:solidFill>
+                    </a:lnR>
+                    <a:lnT w="6350" cap="flat" cmpd="sng" algn="ctr">
+                      <a:solidFill>
+                        <a:srgbClr val="BFBFBF"/>
+                      </a:solidFill>
+                    </a:lnT>
+                    <a:lnB w="6350" cap="flat" cmpd="sng" algn="ctr">
+                      <a:solidFill>
+                        <a:srgbClr val="BFBFBF"/>
+                      </a:solidFill>
+                    </a:lnB>
+                    <a:solidFill>
+                      <a:srgbClr val="FFFFFF"/>
+                    </a:solidFill>
+                  </a:tcPr>
+                </a:tc>
+                <a:tc>
+                  <a:txBody>
+                    <a:bodyPr/>
+                    <a:lstStyle/>
+                    <a:p>
+                      <a:pPr algn="ctr"/>
+                      <a:r>
+                        <a:rPr sz="1000" b="0">
+                          <a:solidFill>
+                            <a:srgbClr val="000000"/>
+                          </a:solidFill>
+                          <a:latin typeface="Calibri"/>
+                        </a:rPr>
+                        <a:t/>
+                      </a:r>
+                    </a:p>
+                  </a:txBody>
+                  <a:tcPr marL="43200" marR="43200" marT="14400" marB="14400" anchor="ctr">
+                    <a:lnL w="6350" cap="flat" cmpd="sng" algn="ctr">
+                      <a:solidFill>
+                        <a:srgbClr val="BFBFBF"/>
+                      </a:solidFill>
+                    </a:lnL>
+                    <a:lnR w="6350" cap="flat" cmpd="sng" algn="ctr">
+                      <a:solidFill>
+                        <a:srgbClr val="BFBFBF"/>
+                      </a:solidFill>
+                    </a:lnR>
+                    <a:lnT w="6350" cap="flat" cmpd="sng" algn="ctr">
+                      <a:solidFill>
+                        <a:srgbClr val="BFBFBF"/>
+                      </a:solidFill>
+                    </a:lnT>
+                    <a:lnB w="6350" cap="flat" cmpd="sng" algn="ctr">
+                      <a:solidFill>
+                        <a:srgbClr val="BFBFBF"/>
+                      </a:solidFill>
+                    </a:lnB>
+                    <a:solidFill>
+                      <a:srgbClr val="FFFFFF"/>
+                    </a:solidFill>
+                  </a:tcPr>
+                </a:tc>
+                <a:tc>
+                  <a:txBody>
+                    <a:bodyPr/>
+                    <a:lstStyle/>
+                    <a:p>
+                      <a:pPr algn="ctr"/>
+                      <a:r>
+                        <a:rPr sz="1000" b="0">
+                          <a:solidFill>
+                            <a:srgbClr val="000000"/>
+                          </a:solidFill>
+                          <a:latin typeface="Calibri"/>
+                        </a:rPr>
+                        <a:t/>
+                      </a:r>
+                    </a:p>
+                  </a:txBody>
+                  <a:tcPr marL="43200" marR="43200" marT="14400" marB="14400" anchor="ctr">
+                    <a:lnL w="6350" cap="flat" cmpd="sng" algn="ctr">
+                      <a:solidFill>
+                        <a:srgbClr val="BFBFBF"/>
+                      </a:solidFill>
+                    </a:lnL>
+                    <a:lnR w="6350" cap="flat" cmpd="sng" algn="ctr">
+                      <a:solidFill>
+                        <a:srgbClr val="BFBFBF"/>
+                      </a:solidFill>
+                    </a:lnR>
+                    <a:lnT w="6350" cap="flat" cmpd="sng" algn="ctr">
+                      <a:solidFill>
+                        <a:srgbClr val="BFBFBF"/>
+                      </a:solidFill>
+                    </a:lnT>
+                    <a:lnB w="6350" cap="flat" cmpd="sng" algn="ctr">
+                      <a:solidFill>
+                        <a:srgbClr val="BFBFBF"/>
+                      </a:solidFill>
+                    </a:lnB>
+                    <a:solidFill>
+                      <a:srgbClr val="FFFFFF"/>
+                    </a:solidFill>
+                  </a:tcPr>
+                </a:tc>
+                <a:tc>
+                  <a:txBody>
+                    <a:bodyPr/>
+                    <a:lstStyle/>
+                    <a:p>
+                      <a:pPr algn="ctr"/>
+                      <a:r>
+                        <a:rPr sz="1000" b="0">
+                          <a:solidFill>
+                            <a:srgbClr val="000000"/>
+                          </a:solidFill>
+                          <a:latin typeface="Calibri"/>
+                        </a:rPr>
+                        <a:t/>
+                      </a:r>
+                    </a:p>
+                  </a:txBody>
+                  <a:tcPr marL="43200" marR="43200" marT="14400" marB="14400" anchor="ctr">
+                    <a:lnL w="6350" cap="flat" cmpd="sng" algn="ctr">
+                      <a:solidFill>
+                        <a:srgbClr val="BFBFBF"/>
+                      </a:solidFill>
+                    </a:lnL>
+                    <a:lnR w="6350" cap="flat" cmpd="sng" algn="ctr">
+                      <a:solidFill>
+                        <a:srgbClr val="BFBFBF"/>
+                      </a:solidFill>
+                    </a:lnR>
+                    <a:lnT w="6350" cap="flat" cmpd="sng" algn="ctr">
+                      <a:solidFill>
+                        <a:srgbClr val="BFBFBF"/>
+                      </a:solidFill>
+                    </a:lnT>
+                    <a:lnB w="6350" cap="flat" cmpd="sng" algn="ctr">
+                      <a:solidFill>
+                        <a:srgbClr val="BFBFBF"/>
+                      </a:solidFill>
+                    </a:lnB>
+                    <a:solidFill>
+                      <a:srgbClr val="FFFFFF"/>
+                    </a:solidFill>
+                  </a:tcPr>
+                </a:tc>
+                <a:tc>
+                  <a:txBody>
+                    <a:bodyPr/>
+                    <a:lstStyle/>
+                    <a:p>
+                      <a:pPr algn="ctr"/>
+                      <a:r>
+                        <a:rPr sz="1000" b="0">
+                          <a:solidFill>
+                            <a:srgbClr val="000000"/>
+                          </a:solidFill>
+                          <a:latin typeface="Calibri"/>
+                        </a:rPr>
+                        <a:t/>
+                      </a:r>
+                    </a:p>
+                  </a:txBody>
+                  <a:tcPr marL="43200" marR="43200" marT="14400" marB="14400" anchor="ctr">
+                    <a:lnL w="6350" cap="flat" cmpd="sng" algn="ctr">
+                      <a:solidFill>
+                        <a:srgbClr val="BFBFBF"/>
+                      </a:solidFill>
+                    </a:lnL>
+                    <a:lnR w="6350" cap="flat" cmpd="sng" algn="ctr">
+                      <a:solidFill>
+                        <a:srgbClr val="BFBFBF"/>
+                      </a:solidFill>
+                    </a:lnR>
+                    <a:lnT w="6350" cap="flat" cmpd="sng" algn="ctr">
+                      <a:solidFill>
+                        <a:srgbClr val="BFBFBF"/>
+                      </a:solidFill>
+                    </a:lnT>
+                    <a:lnB w="6350" cap="flat" cmpd="sng" algn="ctr">
+                      <a:solidFill>
+                        <a:srgbClr val="BFBFBF"/>
+                      </a:solidFill>
+                    </a:lnB>
+                    <a:solidFill>
+                      <a:srgbClr val="FFFFFF"/>
+                    </a:solidFill>
+                  </a:tcPr>
+                </a:tc>
+                <a:tc>
+                  <a:txBody>
+                    <a:bodyPr/>
+                    <a:lstStyle/>
+                    <a:p>
+                      <a:pPr algn="ctr"/>
+                      <a:r>
+                        <a:rPr sz="1000" b="0">
+                          <a:solidFill>
+                            <a:srgbClr val="000000"/>
+                          </a:solidFill>
+                          <a:latin typeface="Calibri"/>
+                        </a:rPr>
+                        <a:t/>
+                      </a:r>
+                    </a:p>
+                  </a:txBody>
+                  <a:tcPr marL="43200" marR="43200" marT="14400" marB="14400" anchor="ctr">
+                    <a:lnL w="6350" cap="flat" cmpd="sng" algn="ctr">
+                      <a:solidFill>
+                        <a:srgbClr val="BFBFBF"/>
+                      </a:solidFill>
+                    </a:lnL>
+                    <a:lnR w="6350" cap="flat" cmpd="sng" algn="ctr">
+                      <a:solidFill>
+                        <a:srgbClr val="BFBFBF"/>
+                      </a:solidFill>
+                    </a:lnR>
+                    <a:lnT w="6350" cap="flat" cmpd="sng" algn="ctr">
+                      <a:solidFill>
+                        <a:srgbClr val="BFBFBF"/>
+                      </a:solidFill>
+                    </a:lnT>
+                    <a:lnB w="6350" cap="flat" cmpd="sng" algn="ctr">
+                      <a:solidFill>
+                        <a:srgbClr val="BFBFBF"/>
+                      </a:solidFill>
+                    </a:lnB>
+                    <a:solidFill>
+                      <a:srgbClr val="FFFFFF"/>
+                    </a:solidFill>
+                  </a:tcPr>
+                </a:tc>
+                <a:tc>
+                  <a:txBody>
+                    <a:bodyPr/>
+                    <a:lstStyle/>
+                    <a:p>
+                      <a:pPr algn="ctr"/>
+                      <a:r>
+                        <a:rPr sz="1000" b="0">
+                          <a:solidFill>
+                            <a:srgbClr val="000000"/>
+                          </a:solidFill>
+                          <a:latin typeface="Calibri"/>
+                        </a:rPr>
+                        <a:t/>
+                      </a:r>
+                    </a:p>
+                  </a:txBody>
+                  <a:tcPr marL="43200" marR="43200" marT="14400" marB="14400" anchor="ctr">
+                    <a:lnL w="6350" cap="flat" cmpd="sng" algn="ctr">
+                      <a:solidFill>
+                        <a:srgbClr val="BFBFBF"/>
+                      </a:solidFill>
+                    </a:lnL>
+                    <a:lnR w="6350" cap="flat" cmpd="sng" algn="ctr">
+                      <a:solidFill>
+                        <a:srgbClr val="BFBFBF"/>
+                      </a:solidFill>
+                    </a:lnR>
+                    <a:lnT w="6350" cap="flat" cmpd="sng" algn="ctr">
+                      <a:solidFill>
+                        <a:srgbClr val="BFBFBF"/>
+                      </a:solidFill>
+                    </a:lnT>
+                    <a:lnB w="6350" cap="flat" cmpd="sng" algn="ctr">
+                      <a:solidFill>
+                        <a:srgbClr val="BFBFBF"/>
+                      </a:solidFill>
+                    </a:lnB>
+                    <a:solidFill>
+                      <a:srgbClr val="FFFFFF"/>
+                    </a:solidFill>
+                  </a:tcPr>
+                </a:tc>
+              </a:tr>
+              <a:tr h="406080">
+                <a:tc>
+                  <a:txBody>
+                    <a:bodyPr/>
+                    <a:lstStyle/>
+                    <a:p>
+                      <a:pPr algn="l"/>
+                      <a:r>
+                        <a:rPr sz="1200" b="0">
+                          <a:solidFill>
+                            <a:srgbClr val="000000"/>
+                          </a:solidFill>
+                          <a:latin typeface="Calibri"/>
+                        </a:rPr>
+                        <a:t>Generación de documentos compartidos, Git y Jira</a:t>
+                      </a:r>
+                    </a:p>
+                  </a:txBody>
+                  <a:tcPr marL="43200" marR="43200" marT="14400" marB="14400" anchor="ctr">
+                    <a:lnL w="6350" cap="flat" cmpd="sng" algn="ctr">
+                      <a:solidFill>
+                        <a:srgbClr val="BFBFBF"/>
+                      </a:solidFill>
+                    </a:lnL>
+                    <a:lnR w="6350" cap="flat" cmpd="sng" algn="ctr">
+                      <a:solidFill>
+                        <a:srgbClr val="BFBFBF"/>
+                      </a:solidFill>
+                    </a:lnR>
+                    <a:lnT w="6350" cap="flat" cmpd="sng" algn="ctr">
+                      <a:solidFill>
+                        <a:srgbClr val="BFBFBF"/>
+                      </a:solidFill>
+                    </a:lnT>
+                    <a:lnB w="6350" cap="flat" cmpd="sng" algn="ctr">
+                      <a:solidFill>
+                        <a:srgbClr val="BFBFBF"/>
+                      </a:solidFill>
+                    </a:lnB>
+                    <a:solidFill>
+                      <a:srgbClr val="FFFFFF"/>
+                    </a:solidFill>
+                  </a:tcPr>
+                </a:tc>
+                <a:tc>
+                  <a:txBody>
+                    <a:bodyPr/>
+                    <a:lstStyle/>
+                    <a:p>
+                      <a:pPr algn="ctr"/>
+                      <a:r>
+                        <a:rPr sz="1000" b="0">
+                          <a:solidFill>
+                            <a:srgbClr val="000000"/>
+                          </a:solidFill>
+                          <a:latin typeface="Calibri"/>
+                        </a:rPr>
+                        <a:t/>
+                      </a:r>
+                    </a:p>
+                  </a:txBody>
+                  <a:tcPr marL="43200" marR="43200" marT="14400" marB="14400" anchor="ctr">
+                    <a:lnL w="6350" cap="flat" cmpd="sng" algn="ctr">
+                      <a:solidFill>
+                        <a:srgbClr val="BFBFBF"/>
+                      </a:solidFill>
+                    </a:lnL>
+                    <a:lnR w="6350" cap="flat" cmpd="sng" algn="ctr">
+                      <a:solidFill>
+                        <a:srgbClr val="BFBFBF"/>
+                      </a:solidFill>
+                    </a:lnR>
+                    <a:lnT w="6350" cap="flat" cmpd="sng" algn="ctr">
+                      <a:solidFill>
+                        <a:srgbClr val="BFBFBF"/>
+                      </a:solidFill>
+                    </a:lnT>
+                    <a:lnB w="6350" cap="flat" cmpd="sng" algn="ctr">
+                      <a:solidFill>
+                        <a:srgbClr val="BFBFBF"/>
+                      </a:solidFill>
+                    </a:lnB>
+                    <a:solidFill>
+                      <a:srgbClr val="FFFFFF"/>
                     </a:solidFill>
                   </a:tcPr>
                 </a:tc>
@@ -26264,7 +28678,7 @@
                       </a:solidFill>
                     </a:lnB>
                     <a:solidFill>
-                      <a:srgbClr val="A9D08E"/>
+                      <a:srgbClr val="FFFFFF"/>
                     </a:solidFill>
                   </a:tcPr>
                 </a:tc>
@@ -26870,8 +29284,51 @@
                     </a:solidFill>
                   </a:tcPr>
                 </a:tc>
+                <a:tc>
+                  <a:txBody>
+                    <a:bodyPr/>
+                    <a:lstStyle/>
+                    <a:p>
+                      <a:pPr algn="ctr"/>
+                      <a:r>
+                        <a:rPr sz="1000" b="0">
+                          <a:solidFill>
+                            <a:srgbClr val="000000"/>
+                          </a:solidFill>
+                          <a:latin typeface="Calibri"/>
+                        </a:rPr>
+                        <a:t/>
+                      </a:r>
+                    </a:p>
+                  </a:txBody>
+                  <a:tcPr marL="43200" marR="43200" marT="14400" marB="14400" anchor="ctr">
+                    <a:lnL w="6350" cap="flat" cmpd="sng" algn="ctr">
+                      <a:solidFill>
+                        <a:srgbClr val="BFBFBF"/>
+                      </a:solidFill>
+                    </a:lnL>
+                    <a:lnR w="6350" cap="flat" cmpd="sng" algn="ctr">
+                      <a:solidFill>
+                        <a:srgbClr val="BFBFBF"/>
+                      </a:solidFill>
+                    </a:lnR>
+                    <a:lnT w="6350" cap="flat" cmpd="sng" algn="ctr">
+                      <a:solidFill>
+                        <a:srgbClr val="BFBFBF"/>
+                      </a:solidFill>
+                    </a:lnT>
+                    <a:lnB w="6350" cap="flat" cmpd="sng" algn="ctr">
+                      <a:solidFill>
+                        <a:srgbClr val="BFBFBF"/>
+                      </a:solidFill>
+                    </a:lnB>
+                    <a:solidFill>
+                      <a:srgbClr val="FFFFFF"/>
+                    </a:solidFill>
+                  </a:tcPr>
+                </a:tc>
               </a:tr>
-              <a:tr h="367200">
+              <a:tr h="262944">
                 <a:tc>
                   <a:txBody>
                     <a:bodyPr/>
@@ -26885,7 +29342,7 @@
                           </a:solidFill>
                           <a:latin typeface="Calibri"/>
                         </a:rPr>
-                        <a:t>Arquitectura, modelo de datos y wireframes</a:t>
+                        <a:t>Reunión con Alloxentric</a:t>
                       </a:r>
                     </a:p>
                   </a:txBody>
@@ -26997,7 +29454,7 @@
                       </a:solidFill>
                     </a:lnB>
                     <a:solidFill>
-                      <a:srgbClr val="A9D08E"/>
+                      <a:srgbClr val="FFFFFF"/>
                     </a:solidFill>
                   </a:tcPr>
                 </a:tc>
@@ -27083,7 +29540,7 @@
                       </a:solidFill>
                     </a:lnB>
                     <a:solidFill>
-                      <a:srgbClr val="A9D08E"/>
+                      <a:srgbClr val="FFFFFF"/>
                     </a:solidFill>
                   </a:tcPr>
                 </a:tc>
@@ -27690,7 +30147,7 @@
                   </a:tcPr>
                 </a:tc>
               </a:tr>
-              <a:tr h="367200">
+              <a:tr h="262944">
                 <a:tc>
                   <a:txBody>
                     <a:bodyPr/>
@@ -27698,13 +30155,13 @@
                     <a:p>
                       <a:pPr algn="l"/>
                       <a:r>
-                        <a:rPr sz="1200" b="0">
+                        <a:rPr sz="1200" b="1">
                           <a:solidFill>
                             <a:srgbClr val="000000"/>
                           </a:solidFill>
                           <a:latin typeface="Calibri"/>
                         </a:rPr>
-                        <a:t>Despliegue, CI/CD y alta de los cuatro clientes</a:t>
+                        <a:t>Presentación de planificación</a:t>
                       </a:r>
                     </a:p>
                   </a:txBody>
@@ -27902,6 +30359,825 @@
                       </a:solidFill>
                     </a:lnB>
                     <a:solidFill>
+                      <a:srgbClr val="A9D08E"/>
+                    </a:solidFill>
+                  </a:tcPr>
+                </a:tc>
+                <a:tc>
+                  <a:txBody>
+                    <a:bodyPr/>
+                    <a:lstStyle/>
+                    <a:p>
+                      <a:pPr algn="ctr"/>
+                      <a:r>
+                        <a:rPr sz="1000" b="0">
+                          <a:solidFill>
+                            <a:srgbClr val="000000"/>
+                          </a:solidFill>
+                          <a:latin typeface="Calibri"/>
+                        </a:rPr>
+                        <a:t/>
+                      </a:r>
+                    </a:p>
+                  </a:txBody>
+                  <a:tcPr marL="43200" marR="43200" marT="14400" marB="14400" anchor="ctr">
+                    <a:lnL w="6350" cap="flat" cmpd="sng" algn="ctr">
+                      <a:solidFill>
+                        <a:srgbClr val="BFBFBF"/>
+                      </a:solidFill>
+                    </a:lnL>
+                    <a:lnR w="6350" cap="flat" cmpd="sng" algn="ctr">
+                      <a:solidFill>
+                        <a:srgbClr val="BFBFBF"/>
+                      </a:solidFill>
+                    </a:lnR>
+                    <a:lnT w="6350" cap="flat" cmpd="sng" algn="ctr">
+                      <a:solidFill>
+                        <a:srgbClr val="BFBFBF"/>
+                      </a:solidFill>
+                    </a:lnT>
+                    <a:lnB w="6350" cap="flat" cmpd="sng" algn="ctr">
+                      <a:solidFill>
+                        <a:srgbClr val="BFBFBF"/>
+                      </a:solidFill>
+                    </a:lnB>
+                    <a:solidFill>
+                      <a:srgbClr val="FFFFFF"/>
+                    </a:solidFill>
+                  </a:tcPr>
+                </a:tc>
+                <a:tc>
+                  <a:txBody>
+                    <a:bodyPr/>
+                    <a:lstStyle/>
+                    <a:p>
+                      <a:pPr algn="ctr"/>
+                      <a:r>
+                        <a:rPr sz="1000" b="0">
+                          <a:solidFill>
+                            <a:srgbClr val="000000"/>
+                          </a:solidFill>
+                          <a:latin typeface="Calibri"/>
+                        </a:rPr>
+                        <a:t/>
+                      </a:r>
+                    </a:p>
+                  </a:txBody>
+                  <a:tcPr marL="43200" marR="43200" marT="14400" marB="14400" anchor="ctr">
+                    <a:lnL w="6350" cap="flat" cmpd="sng" algn="ctr">
+                      <a:solidFill>
+                        <a:srgbClr val="BFBFBF"/>
+                      </a:solidFill>
+                    </a:lnL>
+                    <a:lnR w="6350" cap="flat" cmpd="sng" algn="ctr">
+                      <a:solidFill>
+                        <a:srgbClr val="BFBFBF"/>
+                      </a:solidFill>
+                    </a:lnR>
+                    <a:lnT w="6350" cap="flat" cmpd="sng" algn="ctr">
+                      <a:solidFill>
+                        <a:srgbClr val="BFBFBF"/>
+                      </a:solidFill>
+                    </a:lnT>
+                    <a:lnB w="6350" cap="flat" cmpd="sng" algn="ctr">
+                      <a:solidFill>
+                        <a:srgbClr val="BFBFBF"/>
+                      </a:solidFill>
+                    </a:lnB>
+                    <a:solidFill>
+                      <a:srgbClr val="FFFFFF"/>
+                    </a:solidFill>
+                  </a:tcPr>
+                </a:tc>
+                <a:tc>
+                  <a:txBody>
+                    <a:bodyPr/>
+                    <a:lstStyle/>
+                    <a:p>
+                      <a:pPr algn="ctr"/>
+                      <a:r>
+                        <a:rPr sz="1000" b="0">
+                          <a:solidFill>
+                            <a:srgbClr val="000000"/>
+                          </a:solidFill>
+                          <a:latin typeface="Calibri"/>
+                        </a:rPr>
+                        <a:t/>
+                      </a:r>
+                    </a:p>
+                  </a:txBody>
+                  <a:tcPr marL="43200" marR="43200" marT="14400" marB="14400" anchor="ctr">
+                    <a:lnL w="6350" cap="flat" cmpd="sng" algn="ctr">
+                      <a:solidFill>
+                        <a:srgbClr val="BFBFBF"/>
+                      </a:solidFill>
+                    </a:lnL>
+                    <a:lnR w="6350" cap="flat" cmpd="sng" algn="ctr">
+                      <a:solidFill>
+                        <a:srgbClr val="BFBFBF"/>
+                      </a:solidFill>
+                    </a:lnR>
+                    <a:lnT w="6350" cap="flat" cmpd="sng" algn="ctr">
+                      <a:solidFill>
+                        <a:srgbClr val="BFBFBF"/>
+                      </a:solidFill>
+                    </a:lnT>
+                    <a:lnB w="6350" cap="flat" cmpd="sng" algn="ctr">
+                      <a:solidFill>
+                        <a:srgbClr val="BFBFBF"/>
+                      </a:solidFill>
+                    </a:lnB>
+                    <a:solidFill>
+                      <a:srgbClr val="FFFFFF"/>
+                    </a:solidFill>
+                  </a:tcPr>
+                </a:tc>
+                <a:tc>
+                  <a:txBody>
+                    <a:bodyPr/>
+                    <a:lstStyle/>
+                    <a:p>
+                      <a:pPr algn="ctr"/>
+                      <a:r>
+                        <a:rPr sz="1000" b="0">
+                          <a:solidFill>
+                            <a:srgbClr val="000000"/>
+                          </a:solidFill>
+                          <a:latin typeface="Calibri"/>
+                        </a:rPr>
+                        <a:t/>
+                      </a:r>
+                    </a:p>
+                  </a:txBody>
+                  <a:tcPr marL="43200" marR="43200" marT="14400" marB="14400" anchor="ctr">
+                    <a:lnL w="6350" cap="flat" cmpd="sng" algn="ctr">
+                      <a:solidFill>
+                        <a:srgbClr val="BFBFBF"/>
+                      </a:solidFill>
+                    </a:lnL>
+                    <a:lnR w="6350" cap="flat" cmpd="sng" algn="ctr">
+                      <a:solidFill>
+                        <a:srgbClr val="BFBFBF"/>
+                      </a:solidFill>
+                    </a:lnR>
+                    <a:lnT w="6350" cap="flat" cmpd="sng" algn="ctr">
+                      <a:solidFill>
+                        <a:srgbClr val="BFBFBF"/>
+                      </a:solidFill>
+                    </a:lnT>
+                    <a:lnB w="6350" cap="flat" cmpd="sng" algn="ctr">
+                      <a:solidFill>
+                        <a:srgbClr val="BFBFBF"/>
+                      </a:solidFill>
+                    </a:lnB>
+                    <a:solidFill>
+                      <a:srgbClr val="FFFFFF"/>
+                    </a:solidFill>
+                  </a:tcPr>
+                </a:tc>
+                <a:tc>
+                  <a:txBody>
+                    <a:bodyPr/>
+                    <a:lstStyle/>
+                    <a:p>
+                      <a:pPr algn="ctr"/>
+                      <a:r>
+                        <a:rPr sz="1000" b="0">
+                          <a:solidFill>
+                            <a:srgbClr val="000000"/>
+                          </a:solidFill>
+                          <a:latin typeface="Calibri"/>
+                        </a:rPr>
+                        <a:t/>
+                      </a:r>
+                    </a:p>
+                  </a:txBody>
+                  <a:tcPr marL="43200" marR="43200" marT="14400" marB="14400" anchor="ctr">
+                    <a:lnL w="6350" cap="flat" cmpd="sng" algn="ctr">
+                      <a:solidFill>
+                        <a:srgbClr val="BFBFBF"/>
+                      </a:solidFill>
+                    </a:lnL>
+                    <a:lnR w="6350" cap="flat" cmpd="sng" algn="ctr">
+                      <a:solidFill>
+                        <a:srgbClr val="BFBFBF"/>
+                      </a:solidFill>
+                    </a:lnR>
+                    <a:lnT w="6350" cap="flat" cmpd="sng" algn="ctr">
+                      <a:solidFill>
+                        <a:srgbClr val="BFBFBF"/>
+                      </a:solidFill>
+                    </a:lnT>
+                    <a:lnB w="6350" cap="flat" cmpd="sng" algn="ctr">
+                      <a:solidFill>
+                        <a:srgbClr val="BFBFBF"/>
+                      </a:solidFill>
+                    </a:lnB>
+                    <a:solidFill>
+                      <a:srgbClr val="FFFFFF"/>
+                    </a:solidFill>
+                  </a:tcPr>
+                </a:tc>
+                <a:tc>
+                  <a:txBody>
+                    <a:bodyPr/>
+                    <a:lstStyle/>
+                    <a:p>
+                      <a:pPr algn="ctr"/>
+                      <a:r>
+                        <a:rPr sz="1000" b="0">
+                          <a:solidFill>
+                            <a:srgbClr val="000000"/>
+                          </a:solidFill>
+                          <a:latin typeface="Calibri"/>
+                        </a:rPr>
+                        <a:t/>
+                      </a:r>
+                    </a:p>
+                  </a:txBody>
+                  <a:tcPr marL="43200" marR="43200" marT="14400" marB="14400" anchor="ctr">
+                    <a:lnL w="6350" cap="flat" cmpd="sng" algn="ctr">
+                      <a:solidFill>
+                        <a:srgbClr val="BFBFBF"/>
+                      </a:solidFill>
+                    </a:lnL>
+                    <a:lnR w="6350" cap="flat" cmpd="sng" algn="ctr">
+                      <a:solidFill>
+                        <a:srgbClr val="BFBFBF"/>
+                      </a:solidFill>
+                    </a:lnR>
+                    <a:lnT w="6350" cap="flat" cmpd="sng" algn="ctr">
+                      <a:solidFill>
+                        <a:srgbClr val="BFBFBF"/>
+                      </a:solidFill>
+                    </a:lnT>
+                    <a:lnB w="6350" cap="flat" cmpd="sng" algn="ctr">
+                      <a:solidFill>
+                        <a:srgbClr val="BFBFBF"/>
+                      </a:solidFill>
+                    </a:lnB>
+                    <a:solidFill>
+                      <a:srgbClr val="FFFFFF"/>
+                    </a:solidFill>
+                  </a:tcPr>
+                </a:tc>
+                <a:tc>
+                  <a:txBody>
+                    <a:bodyPr/>
+                    <a:lstStyle/>
+                    <a:p>
+                      <a:pPr algn="ctr"/>
+                      <a:r>
+                        <a:rPr sz="1000" b="0">
+                          <a:solidFill>
+                            <a:srgbClr val="000000"/>
+                          </a:solidFill>
+                          <a:latin typeface="Calibri"/>
+                        </a:rPr>
+                        <a:t/>
+                      </a:r>
+                    </a:p>
+                  </a:txBody>
+                  <a:tcPr marL="43200" marR="43200" marT="14400" marB="14400" anchor="ctr">
+                    <a:lnL w="6350" cap="flat" cmpd="sng" algn="ctr">
+                      <a:solidFill>
+                        <a:srgbClr val="BFBFBF"/>
+                      </a:solidFill>
+                    </a:lnL>
+                    <a:lnR w="6350" cap="flat" cmpd="sng" algn="ctr">
+                      <a:solidFill>
+                        <a:srgbClr val="BFBFBF"/>
+                      </a:solidFill>
+                    </a:lnR>
+                    <a:lnT w="6350" cap="flat" cmpd="sng" algn="ctr">
+                      <a:solidFill>
+                        <a:srgbClr val="BFBFBF"/>
+                      </a:solidFill>
+                    </a:lnT>
+                    <a:lnB w="6350" cap="flat" cmpd="sng" algn="ctr">
+                      <a:solidFill>
+                        <a:srgbClr val="BFBFBF"/>
+                      </a:solidFill>
+                    </a:lnB>
+                    <a:solidFill>
+                      <a:srgbClr val="FFFFFF"/>
+                    </a:solidFill>
+                  </a:tcPr>
+                </a:tc>
+                <a:tc>
+                  <a:txBody>
+                    <a:bodyPr/>
+                    <a:lstStyle/>
+                    <a:p>
+                      <a:pPr algn="ctr"/>
+                      <a:r>
+                        <a:rPr sz="1000" b="0">
+                          <a:solidFill>
+                            <a:srgbClr val="000000"/>
+                          </a:solidFill>
+                          <a:latin typeface="Calibri"/>
+                        </a:rPr>
+                        <a:t/>
+                      </a:r>
+                    </a:p>
+                  </a:txBody>
+                  <a:tcPr marL="43200" marR="43200" marT="14400" marB="14400" anchor="ctr">
+                    <a:lnL w="6350" cap="flat" cmpd="sng" algn="ctr">
+                      <a:solidFill>
+                        <a:srgbClr val="BFBFBF"/>
+                      </a:solidFill>
+                    </a:lnL>
+                    <a:lnR w="6350" cap="flat" cmpd="sng" algn="ctr">
+                      <a:solidFill>
+                        <a:srgbClr val="BFBFBF"/>
+                      </a:solidFill>
+                    </a:lnR>
+                    <a:lnT w="6350" cap="flat" cmpd="sng" algn="ctr">
+                      <a:solidFill>
+                        <a:srgbClr val="BFBFBF"/>
+                      </a:solidFill>
+                    </a:lnT>
+                    <a:lnB w="6350" cap="flat" cmpd="sng" algn="ctr">
+                      <a:solidFill>
+                        <a:srgbClr val="BFBFBF"/>
+                      </a:solidFill>
+                    </a:lnB>
+                    <a:solidFill>
+                      <a:srgbClr val="FFFFFF"/>
+                    </a:solidFill>
+                  </a:tcPr>
+                </a:tc>
+                <a:tc>
+                  <a:txBody>
+                    <a:bodyPr/>
+                    <a:lstStyle/>
+                    <a:p>
+                      <a:pPr algn="ctr"/>
+                      <a:r>
+                        <a:rPr sz="1000" b="0">
+                          <a:solidFill>
+                            <a:srgbClr val="000000"/>
+                          </a:solidFill>
+                          <a:latin typeface="Calibri"/>
+                        </a:rPr>
+                        <a:t/>
+                      </a:r>
+                    </a:p>
+                  </a:txBody>
+                  <a:tcPr marL="43200" marR="43200" marT="14400" marB="14400" anchor="ctr">
+                    <a:lnL w="6350" cap="flat" cmpd="sng" algn="ctr">
+                      <a:solidFill>
+                        <a:srgbClr val="BFBFBF"/>
+                      </a:solidFill>
+                    </a:lnL>
+                    <a:lnR w="6350" cap="flat" cmpd="sng" algn="ctr">
+                      <a:solidFill>
+                        <a:srgbClr val="BFBFBF"/>
+                      </a:solidFill>
+                    </a:lnR>
+                    <a:lnT w="6350" cap="flat" cmpd="sng" algn="ctr">
+                      <a:solidFill>
+                        <a:srgbClr val="BFBFBF"/>
+                      </a:solidFill>
+                    </a:lnT>
+                    <a:lnB w="6350" cap="flat" cmpd="sng" algn="ctr">
+                      <a:solidFill>
+                        <a:srgbClr val="BFBFBF"/>
+                      </a:solidFill>
+                    </a:lnB>
+                    <a:solidFill>
+                      <a:srgbClr val="FFFFFF"/>
+                    </a:solidFill>
+                  </a:tcPr>
+                </a:tc>
+                <a:tc>
+                  <a:txBody>
+                    <a:bodyPr/>
+                    <a:lstStyle/>
+                    <a:p>
+                      <a:pPr algn="ctr"/>
+                      <a:r>
+                        <a:rPr sz="1000" b="0">
+                          <a:solidFill>
+                            <a:srgbClr val="000000"/>
+                          </a:solidFill>
+                          <a:latin typeface="Calibri"/>
+                        </a:rPr>
+                        <a:t/>
+                      </a:r>
+                    </a:p>
+                  </a:txBody>
+                  <a:tcPr marL="43200" marR="43200" marT="14400" marB="14400" anchor="ctr">
+                    <a:lnL w="6350" cap="flat" cmpd="sng" algn="ctr">
+                      <a:solidFill>
+                        <a:srgbClr val="BFBFBF"/>
+                      </a:solidFill>
+                    </a:lnL>
+                    <a:lnR w="6350" cap="flat" cmpd="sng" algn="ctr">
+                      <a:solidFill>
+                        <a:srgbClr val="BFBFBF"/>
+                      </a:solidFill>
+                    </a:lnR>
+                    <a:lnT w="6350" cap="flat" cmpd="sng" algn="ctr">
+                      <a:solidFill>
+                        <a:srgbClr val="BFBFBF"/>
+                      </a:solidFill>
+                    </a:lnT>
+                    <a:lnB w="6350" cap="flat" cmpd="sng" algn="ctr">
+                      <a:solidFill>
+                        <a:srgbClr val="BFBFBF"/>
+                      </a:solidFill>
+                    </a:lnB>
+                    <a:solidFill>
+                      <a:srgbClr val="FFFFFF"/>
+                    </a:solidFill>
+                  </a:tcPr>
+                </a:tc>
+                <a:tc>
+                  <a:txBody>
+                    <a:bodyPr/>
+                    <a:lstStyle/>
+                    <a:p>
+                      <a:pPr algn="ctr"/>
+                      <a:r>
+                        <a:rPr sz="1000" b="0">
+                          <a:solidFill>
+                            <a:srgbClr val="000000"/>
+                          </a:solidFill>
+                          <a:latin typeface="Calibri"/>
+                        </a:rPr>
+                        <a:t/>
+                      </a:r>
+                    </a:p>
+                  </a:txBody>
+                  <a:tcPr marL="43200" marR="43200" marT="14400" marB="14400" anchor="ctr">
+                    <a:lnL w="6350" cap="flat" cmpd="sng" algn="ctr">
+                      <a:solidFill>
+                        <a:srgbClr val="BFBFBF"/>
+                      </a:solidFill>
+                    </a:lnL>
+                    <a:lnR w="6350" cap="flat" cmpd="sng" algn="ctr">
+                      <a:solidFill>
+                        <a:srgbClr val="BFBFBF"/>
+                      </a:solidFill>
+                    </a:lnR>
+                    <a:lnT w="6350" cap="flat" cmpd="sng" algn="ctr">
+                      <a:solidFill>
+                        <a:srgbClr val="BFBFBF"/>
+                      </a:solidFill>
+                    </a:lnT>
+                    <a:lnB w="6350" cap="flat" cmpd="sng" algn="ctr">
+                      <a:solidFill>
+                        <a:srgbClr val="BFBFBF"/>
+                      </a:solidFill>
+                    </a:lnB>
+                    <a:solidFill>
+                      <a:srgbClr val="FFFFFF"/>
+                    </a:solidFill>
+                  </a:tcPr>
+                </a:tc>
+                <a:tc>
+                  <a:txBody>
+                    <a:bodyPr/>
+                    <a:lstStyle/>
+                    <a:p>
+                      <a:pPr algn="ctr"/>
+                      <a:r>
+                        <a:rPr sz="1000" b="0">
+                          <a:solidFill>
+                            <a:srgbClr val="000000"/>
+                          </a:solidFill>
+                          <a:latin typeface="Calibri"/>
+                        </a:rPr>
+                        <a:t/>
+                      </a:r>
+                    </a:p>
+                  </a:txBody>
+                  <a:tcPr marL="43200" marR="43200" marT="14400" marB="14400" anchor="ctr">
+                    <a:lnL w="6350" cap="flat" cmpd="sng" algn="ctr">
+                      <a:solidFill>
+                        <a:srgbClr val="BFBFBF"/>
+                      </a:solidFill>
+                    </a:lnL>
+                    <a:lnR w="6350" cap="flat" cmpd="sng" algn="ctr">
+                      <a:solidFill>
+                        <a:srgbClr val="BFBFBF"/>
+                      </a:solidFill>
+                    </a:lnR>
+                    <a:lnT w="6350" cap="flat" cmpd="sng" algn="ctr">
+                      <a:solidFill>
+                        <a:srgbClr val="BFBFBF"/>
+                      </a:solidFill>
+                    </a:lnT>
+                    <a:lnB w="6350" cap="flat" cmpd="sng" algn="ctr">
+                      <a:solidFill>
+                        <a:srgbClr val="BFBFBF"/>
+                      </a:solidFill>
+                    </a:lnB>
+                    <a:solidFill>
+                      <a:srgbClr val="FFFFFF"/>
+                    </a:solidFill>
+                  </a:tcPr>
+                </a:tc>
+                <a:tc>
+                  <a:txBody>
+                    <a:bodyPr/>
+                    <a:lstStyle/>
+                    <a:p>
+                      <a:pPr algn="ctr"/>
+                      <a:r>
+                        <a:rPr sz="1000" b="0">
+                          <a:solidFill>
+                            <a:srgbClr val="000000"/>
+                          </a:solidFill>
+                          <a:latin typeface="Calibri"/>
+                        </a:rPr>
+                        <a:t/>
+                      </a:r>
+                    </a:p>
+                  </a:txBody>
+                  <a:tcPr marL="43200" marR="43200" marT="14400" marB="14400" anchor="ctr">
+                    <a:lnL w="6350" cap="flat" cmpd="sng" algn="ctr">
+                      <a:solidFill>
+                        <a:srgbClr val="BFBFBF"/>
+                      </a:solidFill>
+                    </a:lnL>
+                    <a:lnR w="6350" cap="flat" cmpd="sng" algn="ctr">
+                      <a:solidFill>
+                        <a:srgbClr val="BFBFBF"/>
+                      </a:solidFill>
+                    </a:lnR>
+                    <a:lnT w="6350" cap="flat" cmpd="sng" algn="ctr">
+                      <a:solidFill>
+                        <a:srgbClr val="BFBFBF"/>
+                      </a:solidFill>
+                    </a:lnT>
+                    <a:lnB w="6350" cap="flat" cmpd="sng" algn="ctr">
+                      <a:solidFill>
+                        <a:srgbClr val="BFBFBF"/>
+                      </a:solidFill>
+                    </a:lnB>
+                    <a:solidFill>
+                      <a:srgbClr val="FFFFFF"/>
+                    </a:solidFill>
+                  </a:tcPr>
+                </a:tc>
+                <a:tc>
+                  <a:txBody>
+                    <a:bodyPr/>
+                    <a:lstStyle/>
+                    <a:p>
+                      <a:pPr algn="ctr"/>
+                      <a:r>
+                        <a:rPr sz="1000" b="0">
+                          <a:solidFill>
+                            <a:srgbClr val="000000"/>
+                          </a:solidFill>
+                          <a:latin typeface="Calibri"/>
+                        </a:rPr>
+                        <a:t/>
+                      </a:r>
+                    </a:p>
+                  </a:txBody>
+                  <a:tcPr marL="43200" marR="43200" marT="14400" marB="14400" anchor="ctr">
+                    <a:lnL w="6350" cap="flat" cmpd="sng" algn="ctr">
+                      <a:solidFill>
+                        <a:srgbClr val="BFBFBF"/>
+                      </a:solidFill>
+                    </a:lnL>
+                    <a:lnR w="6350" cap="flat" cmpd="sng" algn="ctr">
+                      <a:solidFill>
+                        <a:srgbClr val="BFBFBF"/>
+                      </a:solidFill>
+                    </a:lnR>
+                    <a:lnT w="6350" cap="flat" cmpd="sng" algn="ctr">
+                      <a:solidFill>
+                        <a:srgbClr val="BFBFBF"/>
+                      </a:solidFill>
+                    </a:lnT>
+                    <a:lnB w="6350" cap="flat" cmpd="sng" algn="ctr">
+                      <a:solidFill>
+                        <a:srgbClr val="BFBFBF"/>
+                      </a:solidFill>
+                    </a:lnB>
+                    <a:solidFill>
+                      <a:srgbClr val="FFFFFF"/>
+                    </a:solidFill>
+                  </a:tcPr>
+                </a:tc>
+              </a:tr>
+              <a:tr h="262944">
+                <a:tc>
+                  <a:txBody>
+                    <a:bodyPr/>
+                    <a:lstStyle/>
+                    <a:p>
+                      <a:pPr algn="l"/>
+                      <a:r>
+                        <a:rPr sz="1200" b="0">
+                          <a:solidFill>
+                            <a:srgbClr val="000000"/>
+                          </a:solidFill>
+                          <a:latin typeface="Calibri"/>
+                        </a:rPr>
+                        <a:t>Desarrollo funcionalidad multi-tenant</a:t>
+                      </a:r>
+                    </a:p>
+                  </a:txBody>
+                  <a:tcPr marL="43200" marR="43200" marT="14400" marB="14400" anchor="ctr">
+                    <a:lnL w="6350" cap="flat" cmpd="sng" algn="ctr">
+                      <a:solidFill>
+                        <a:srgbClr val="BFBFBF"/>
+                      </a:solidFill>
+                    </a:lnL>
+                    <a:lnR w="6350" cap="flat" cmpd="sng" algn="ctr">
+                      <a:solidFill>
+                        <a:srgbClr val="BFBFBF"/>
+                      </a:solidFill>
+                    </a:lnR>
+                    <a:lnT w="6350" cap="flat" cmpd="sng" algn="ctr">
+                      <a:solidFill>
+                        <a:srgbClr val="BFBFBF"/>
+                      </a:solidFill>
+                    </a:lnT>
+                    <a:lnB w="6350" cap="flat" cmpd="sng" algn="ctr">
+                      <a:solidFill>
+                        <a:srgbClr val="BFBFBF"/>
+                      </a:solidFill>
+                    </a:lnB>
+                    <a:solidFill>
+                      <a:srgbClr val="FFFFFF"/>
+                    </a:solidFill>
+                  </a:tcPr>
+                </a:tc>
+                <a:tc>
+                  <a:txBody>
+                    <a:bodyPr/>
+                    <a:lstStyle/>
+                    <a:p>
+                      <a:pPr algn="ctr"/>
+                      <a:r>
+                        <a:rPr sz="1000" b="0">
+                          <a:solidFill>
+                            <a:srgbClr val="000000"/>
+                          </a:solidFill>
+                          <a:latin typeface="Calibri"/>
+                        </a:rPr>
+                        <a:t/>
+                      </a:r>
+                    </a:p>
+                  </a:txBody>
+                  <a:tcPr marL="43200" marR="43200" marT="14400" marB="14400" anchor="ctr">
+                    <a:lnL w="6350" cap="flat" cmpd="sng" algn="ctr">
+                      <a:solidFill>
+                        <a:srgbClr val="BFBFBF"/>
+                      </a:solidFill>
+                    </a:lnL>
+                    <a:lnR w="6350" cap="flat" cmpd="sng" algn="ctr">
+                      <a:solidFill>
+                        <a:srgbClr val="BFBFBF"/>
+                      </a:solidFill>
+                    </a:lnR>
+                    <a:lnT w="6350" cap="flat" cmpd="sng" algn="ctr">
+                      <a:solidFill>
+                        <a:srgbClr val="BFBFBF"/>
+                      </a:solidFill>
+                    </a:lnT>
+                    <a:lnB w="6350" cap="flat" cmpd="sng" algn="ctr">
+                      <a:solidFill>
+                        <a:srgbClr val="BFBFBF"/>
+                      </a:solidFill>
+                    </a:lnB>
+                    <a:solidFill>
+                      <a:srgbClr val="FFFFFF"/>
+                    </a:solidFill>
+                  </a:tcPr>
+                </a:tc>
+                <a:tc>
+                  <a:txBody>
+                    <a:bodyPr/>
+                    <a:lstStyle/>
+                    <a:p>
+                      <a:pPr algn="ctr"/>
+                      <a:r>
+                        <a:rPr sz="1000" b="0">
+                          <a:solidFill>
+                            <a:srgbClr val="000000"/>
+                          </a:solidFill>
+                          <a:latin typeface="Calibri"/>
+                        </a:rPr>
+                        <a:t/>
+                      </a:r>
+                    </a:p>
+                  </a:txBody>
+                  <a:tcPr marL="43200" marR="43200" marT="14400" marB="14400" anchor="ctr">
+                    <a:lnL w="6350" cap="flat" cmpd="sng" algn="ctr">
+                      <a:solidFill>
+                        <a:srgbClr val="BFBFBF"/>
+                      </a:solidFill>
+                    </a:lnL>
+                    <a:lnR w="6350" cap="flat" cmpd="sng" algn="ctr">
+                      <a:solidFill>
+                        <a:srgbClr val="BFBFBF"/>
+                      </a:solidFill>
+                    </a:lnR>
+                    <a:lnT w="6350" cap="flat" cmpd="sng" algn="ctr">
+                      <a:solidFill>
+                        <a:srgbClr val="BFBFBF"/>
+                      </a:solidFill>
+                    </a:lnT>
+                    <a:lnB w="6350" cap="flat" cmpd="sng" algn="ctr">
+                      <a:solidFill>
+                        <a:srgbClr val="BFBFBF"/>
+                      </a:solidFill>
+                    </a:lnB>
+                    <a:solidFill>
+                      <a:srgbClr val="FFFFFF"/>
+                    </a:solidFill>
+                  </a:tcPr>
+                </a:tc>
+                <a:tc>
+                  <a:txBody>
+                    <a:bodyPr/>
+                    <a:lstStyle/>
+                    <a:p>
+                      <a:pPr algn="ctr"/>
+                      <a:r>
+                        <a:rPr sz="1000" b="0">
+                          <a:solidFill>
+                            <a:srgbClr val="000000"/>
+                          </a:solidFill>
+                          <a:latin typeface="Calibri"/>
+                        </a:rPr>
+                        <a:t/>
+                      </a:r>
+                    </a:p>
+                  </a:txBody>
+                  <a:tcPr marL="43200" marR="43200" marT="14400" marB="14400" anchor="ctr">
+                    <a:lnL w="6350" cap="flat" cmpd="sng" algn="ctr">
+                      <a:solidFill>
+                        <a:srgbClr val="BFBFBF"/>
+                      </a:solidFill>
+                    </a:lnL>
+                    <a:lnR w="6350" cap="flat" cmpd="sng" algn="ctr">
+                      <a:solidFill>
+                        <a:srgbClr val="BFBFBF"/>
+                      </a:solidFill>
+                    </a:lnR>
+                    <a:lnT w="6350" cap="flat" cmpd="sng" algn="ctr">
+                      <a:solidFill>
+                        <a:srgbClr val="BFBFBF"/>
+                      </a:solidFill>
+                    </a:lnT>
+                    <a:lnB w="6350" cap="flat" cmpd="sng" algn="ctr">
+                      <a:solidFill>
+                        <a:srgbClr val="BFBFBF"/>
+                      </a:solidFill>
+                    </a:lnB>
+                    <a:solidFill>
+                      <a:srgbClr val="FFFFFF"/>
+                    </a:solidFill>
+                  </a:tcPr>
+                </a:tc>
+                <a:tc>
+                  <a:txBody>
+                    <a:bodyPr/>
+                    <a:lstStyle/>
+                    <a:p>
+                      <a:pPr algn="ctr"/>
+                      <a:r>
+                        <a:rPr sz="1000" b="0">
+                          <a:solidFill>
+                            <a:srgbClr val="000000"/>
+                          </a:solidFill>
+                          <a:latin typeface="Calibri"/>
+                        </a:rPr>
+                        <a:t/>
+                      </a:r>
+                    </a:p>
+                  </a:txBody>
+                  <a:tcPr marL="43200" marR="43200" marT="14400" marB="14400" anchor="ctr">
+                    <a:lnL w="6350" cap="flat" cmpd="sng" algn="ctr">
+                      <a:solidFill>
+                        <a:srgbClr val="BFBFBF"/>
+                      </a:solidFill>
+                    </a:lnL>
+                    <a:lnR w="6350" cap="flat" cmpd="sng" algn="ctr">
+                      <a:solidFill>
+                        <a:srgbClr val="BFBFBF"/>
+                      </a:solidFill>
+                    </a:lnR>
+                    <a:lnT w="6350" cap="flat" cmpd="sng" algn="ctr">
+                      <a:solidFill>
+                        <a:srgbClr val="BFBFBF"/>
+                      </a:solidFill>
+                    </a:lnT>
+                    <a:lnB w="6350" cap="flat" cmpd="sng" algn="ctr">
+                      <a:solidFill>
+                        <a:srgbClr val="BFBFBF"/>
+                      </a:solidFill>
+                    </a:lnB>
+                    <a:solidFill>
                       <a:srgbClr val="FFFFFF"/>
                     </a:solidFill>
                   </a:tcPr>
@@ -28509,7 +31785,7 @@
                   </a:tcPr>
                 </a:tc>
               </a:tr>
-              <a:tr h="367200">
+              <a:tr h="262944">
                 <a:tc>
                   <a:txBody>
                     <a:bodyPr/>
@@ -28523,7 +31799,7 @@
                           </a:solidFill>
                           <a:latin typeface="Calibri"/>
                         </a:rPr>
-                        <a:t>Ingesta: documentos, FAQ y escaneo del sitio</a:t>
+                        <a:t>Desarrollo base de conocimiento</a:t>
                       </a:r>
                     </a:p>
                   </a:txBody>
@@ -28893,7 +32169,7 @@
                       </a:solidFill>
                     </a:lnB>
                     <a:solidFill>
-                      <a:srgbClr val="FFD966"/>
+                      <a:srgbClr val="FFFFFF"/>
                     </a:solidFill>
                   </a:tcPr>
                 </a:tc>
@@ -29328,7 +32604,7 @@
                   </a:tcPr>
                 </a:tc>
               </a:tr>
-              <a:tr h="367200">
+              <a:tr h="262944">
                 <a:tc>
                   <a:txBody>
                     <a:bodyPr/>
@@ -29342,7 +32618,7 @@
                           </a:solidFill>
                           <a:latin typeface="Calibri"/>
                         </a:rPr>
-                        <a:t>Indexación vectorial por empresa y tipo de chat</a:t>
+                        <a:t>Incorporación base de datos</a:t>
                       </a:r>
                     </a:p>
                   </a:txBody>
@@ -29755,7 +33031,7 @@
                       </a:solidFill>
                     </a:lnB>
                     <a:solidFill>
-                      <a:srgbClr val="FFD966"/>
+                      <a:srgbClr val="FFFFFF"/>
                     </a:solidFill>
                   </a:tcPr>
                 </a:tc>
@@ -30147,7 +33423,7 @@
                   </a:tcPr>
                 </a:tc>
               </a:tr>
-              <a:tr h="367200">
+              <a:tr h="262944">
                 <a:tc>
                   <a:txBody>
                     <a:bodyPr/>
@@ -30161,7 +33437,7 @@
                           </a:solidFill>
                           <a:latin typeface="Calibri"/>
                         </a:rPr>
-                        <a:t>Clasificador de intención y dos agentes RAG</a:t>
+                        <a:t>Integración con frontend</a:t>
                       </a:r>
                     </a:p>
                   </a:txBody>
@@ -30617,7 +33893,7 @@
                       </a:solidFill>
                     </a:lnB>
                     <a:solidFill>
-                      <a:srgbClr val="FFD966"/>
+                      <a:srgbClr val="FFFFFF"/>
                     </a:solidFill>
                   </a:tcPr>
                 </a:tc>
@@ -31018,7 +34294,7 @@
                 </a:solidFill>
                 <a:latin typeface="Calibri"/>
               </a:rPr>
-              <a:t>Seis sprints de dos semanas. Cada uno entrega una parte funcional y verificable, no un documento.</a:t>
+              <a:t>Dieciséis actividades sobre 18 semanas. Cada una entrega una parte funcional y verificable, no un documento.</a:t>
             </a:r>
           </a:p>
           <a:p>
@@ -31034,7 +34310,7 @@
                 </a:solidFill>
                 <a:latin typeface="Calibri"/>
               </a:rPr>
-              <a:t>Semanas 1 a 4 · Fase 1, definición.    Semanas 5 a 16 · Fase 2, desarrollo.    Semanas 17 y 18 · Fase 3, presentación.</a:t>
+              <a:t>Semanas 1 a 4 · Fase 1, planificación.    Semanas 5 a 15 · Fase 2, desarrollo del proyecto.    Semanas 16 a 18 · Fase 3, presentación final.</a:t>
             </a:r>
           </a:p>
         </p:txBody>
